--- a/content/W01/D5/slides/C2_W01_D05_lab_STUDENT.pptx
+++ b/content/W01/D5/slides/C2_W01_D05_lab_STUDENT.pptx
@@ -8602,7 +8602,7 @@
                 </a:solidFill>
                 <a:latin typeface="Calibri"/>
               </a:rPr>
-              <a:t>Week 1 Day 5: the week rebuilt alone</a:t>
+              <a:t>Week 1, Day 5. The week, rebuilt alone</a:t>
             </a:r>
           </a:p>
         </p:txBody>
@@ -13883,7 +13883,7 @@
                 </a:solidFill>
                 <a:latin typeface="Calibri"/>
               </a:rPr>
-              <a:t>Week 1 Day 5: the week rebuilt alone</a:t>
+              <a:t>Week 1, Day 5. The week, rebuilt alone</a:t>
             </a:r>
           </a:p>
         </p:txBody>

--- a/content/W01/D5/slides/C2_W01_D05_lab_STUDENT.pptx
+++ b/content/W01/D5/slides/C2_W01_D05_lab_STUDENT.pptx
@@ -913,12 +913,22 @@
           <a:lstStyle/>
           <a:p>
             <a:r>
-              <a:t>LIVE, 2 minutes. Say the four questions on the table from the row. The first one is the morning's</a:t>
-            </a:r>
-          </a:p>
-          <a:p>
-            <a:r>
-              <a:t>question and the third is the afternoon's. Do not add anything about which step matters most: the</a:t>
+              <a:t>LIVE, 2 minutes. Say the metric, who asks and what a wrong number costs, then the four questions on</a:t>
+            </a:r>
+          </a:p>
+          <a:p>
+            <a:r>
+              <a:t>the table from the row: whether the pipeline is yours or the notebook's, which step you reach for</a:t>
+            </a:r>
+          </a:p>
+          <a:p>
+            <a:r>
+              <a:t>first, whether the note survives a hostile question, and what you still cannot do without help. The</a:t>
+            </a:r>
+          </a:p>
+          <a:p>
+            <a:r>
+              <a:t>first is the morning's question and the third is the afternoon's. Do not add anything about which step matters most: the</a:t>
             </a:r>
           </a:p>
           <a:p>
@@ -6860,7 +6870,7 @@
       </p:sp>
       <p:pic>
         <p:nvPicPr>
-          <p:cNvPr id="9" name="mermaid diagram" descr="8e59c08a40856554.png"/>
+          <p:cNvPr id="9" name="mermaid diagram" descr="bd3afd9b7bd14d54.png"/>
           <p:cNvPicPr>
             <a:picLocks noChangeAspect="1"/>
           </p:cNvPicPr>
@@ -8602,7 +8612,7 @@
                 </a:solidFill>
                 <a:latin typeface="Calibri"/>
               </a:rPr>
-              <a:t>Week 1, Day 5. The week, rebuilt alone</a:t>
+              <a:t>Week 1 Day 5: the week rebuilt alone</a:t>
             </a:r>
           </a:p>
         </p:txBody>
@@ -8885,7 +8895,7 @@
       </p:sp>
       <p:pic>
         <p:nvPicPr>
-          <p:cNvPr id="9" name="mermaid diagram" descr="28a4e9564881742b.png"/>
+          <p:cNvPr id="9" name="mermaid diagram" descr="d7d8ff8209a87d03.png"/>
           <p:cNvPicPr>
             <a:picLocks noChangeAspect="1"/>
           </p:cNvPicPr>
@@ -8916,7 +8926,7 @@
         <p:spPr>
           <a:xfrm>
             <a:off x="530352" y="3903345"/>
-            <a:ext cx="11130991" cy="1121664"/>
+            <a:ext cx="11130991" cy="1380744"/>
           </a:xfrm>
           <a:prstGeom prst="roundRect">
             <a:avLst>
@@ -8975,7 +8985,7 @@
         </p:nvSpPr>
         <p:spPr>
           <a:xfrm>
-            <a:off x="758952" y="4235577"/>
+            <a:off x="758952" y="4365117"/>
             <a:ext cx="457200" cy="457200"/>
           </a:xfrm>
           <a:prstGeom prst="ellipse">
@@ -9027,7 +9037,7 @@
         </p:blipFill>
         <p:spPr>
           <a:xfrm>
-            <a:off x="868680" y="4345305"/>
+            <a:off x="868680" y="4474845"/>
             <a:ext cx="237744" cy="237744"/>
           </a:xfrm>
           <a:prstGeom prst="rect">
@@ -9079,7 +9089,7 @@
         <p:spPr>
           <a:xfrm>
             <a:off x="1399031" y="4269105"/>
-            <a:ext cx="9987991" cy="682752"/>
+            <a:ext cx="9987991" cy="941832"/>
           </a:xfrm>
           <a:prstGeom prst="rect">
             <a:avLst/>
@@ -9099,7 +9109,7 @@
                 </a:solidFill>
                 <a:latin typeface="Calibri"/>
               </a:rPr>
-              <a:t>Whether the week's pipeline is yours or the notebook's; which step you reach for first on a fresh export; whether your note survives a hostile question; what you still cannot do without help.</a:t>
+              <a:t>Which branch of the revenue tree moved booked revenue from Q1 to Q2, in which segment, and does the number tie to Anand's control totals? A first line with the wrong sign sends Monday's review home with nothing to investigate, while Marketing's Rs 12 crore request waits on the answer.</a:t>
             </a:r>
           </a:p>
         </p:txBody>
@@ -9540,7 +9550,7 @@
       </p:sp>
       <p:pic>
         <p:nvPicPr>
-          <p:cNvPr id="9" name="mermaid diagram" descr="91b3a040400b7a85.png"/>
+          <p:cNvPr id="9" name="mermaid diagram" descr="1432138c01826724.png"/>
           <p:cNvPicPr>
             <a:picLocks noChangeAspect="1"/>
           </p:cNvPicPr>
@@ -13213,7 +13223,7 @@
       </p:sp>
       <p:pic>
         <p:nvPicPr>
-          <p:cNvPr id="9" name="mermaid diagram" descr="e4dbf5c0b9b1c819.png"/>
+          <p:cNvPr id="9" name="mermaid diagram" descr="4c7eb4f0a46ddb02.png"/>
           <p:cNvPicPr>
             <a:picLocks noChangeAspect="1"/>
           </p:cNvPicPr>
@@ -13883,7 +13893,7 @@
                 </a:solidFill>
                 <a:latin typeface="Calibri"/>
               </a:rPr>
-              <a:t>Week 1, Day 5. The week, rebuilt alone</a:t>
+              <a:t>Week 1 Day 5: the week rebuilt alone</a:t>
             </a:r>
           </a:p>
         </p:txBody>

--- a/content/W01/D5/slides/C2_W01_D05_lab_STUDENT.pptx
+++ b/content/W01/D5/slides/C2_W01_D05_lab_STUDENT.pptx
@@ -758,7 +758,7 @@
           <a:lstStyle/>
           <a:p>
             <a:r>
-              <a:t>LIVE, 1 minute, then the ten-minute break. The debrief's first break, the reconciliation, runs for</a:t>
+              <a:t>LIVE, 1 minute, then the ten-minute break. The first place the room broke, the reconciliation, runs for</a:t>
             </a:r>
           </a:p>
           <a:p>
@@ -5167,7 +5167,7 @@
                 </a:solidFill>
                 <a:latin typeface="Calibri"/>
               </a:rPr>
-              <a:t>Minutes are a pace, not a limit; the order is not optional.</a:t>
+              <a:t>The minutes are a pace; the order of the steps is fixed.</a:t>
             </a:r>
           </a:p>
         </p:txBody>
@@ -7360,7 +7360,7 @@
                 </a:solidFill>
                 <a:latin typeface="Calibri"/>
               </a:rPr>
-              <a:t>The method is yours when the order holds under a clock, not when each step is remembered.</a:t>
+              <a:t>The method is yours when its order holds under a clock.</a:t>
             </a:r>
           </a:p>
         </p:txBody>
@@ -12556,7 +12556,7 @@
                 </a:solidFill>
                 <a:latin typeface="Calibri"/>
               </a:rPr>
-              <a:t>Observed, not scored</a:t>
+              <a:t>Observed, never scored</a:t>
             </a:r>
           </a:p>
         </p:txBody>

--- a/content/W01/D5/slides/C2_W01_D05_lab_STUDENT.pptx
+++ b/content/W01/D5/slides/C2_W01_D05_lab_STUDENT.pptx
@@ -6926,7 +6926,7 @@
                 </a:solidFill>
                 <a:latin typeface="Calibri"/>
               </a:rPr>
-              <a:t>Write the line under your note in a new markdown cell. It does not change what you handed in; it is what you will say at the debrief.</a:t>
+              <a:t>Write the line under your note in a new markdown cell. What you handed in stays as it was, and this line is what you will say at the debrief.</a:t>
             </a:r>
           </a:p>
         </p:txBody>

--- a/content/W01/D5/slides/C2_W01_D05_lab_STUDENT.pptx
+++ b/content/W01/D5/slides/C2_W01_D05_lab_STUDENT.pptx
@@ -11683,7 +11683,7 @@
                 </a:solidFill>
                 <a:latin typeface="Calibri"/>
               </a:rPr>
-              <a:t>The lab finds out what you own; it does not rank anybody.</a:t>
+              <a:t>The lab shows each person which steps they own, and ranks nobody.</a:t>
             </a:r>
           </a:p>
         </p:txBody>
@@ -12556,7 +12556,7 @@
                 </a:solidFill>
                 <a:latin typeface="Calibri"/>
               </a:rPr>
-              <a:t>Observed, never scored</a:t>
+              <a:t>Observed, with no score</a:t>
             </a:r>
           </a:p>
         </p:txBody>

--- a/content/W01/D5/slides/C2_W01_D05_lab_STUDENT.pptx
+++ b/content/W01/D5/slides/C2_W01_D05_lab_STUDENT.pptx
@@ -758,7 +758,7 @@
           <a:lstStyle/>
           <a:p>
             <a:r>
-              <a:t>LIVE, 1 minute, then the ten-minute break. The first place the room broke, the reconciliation, runs for</a:t>
+              <a:t>LIVE, 1 minute, then the ten-minute break. The debrief's first chapter, the reconciliation, runs for</a:t>
             </a:r>
           </a:p>
           <a:p>
@@ -768,7 +768,12 @@
           </a:p>
           <a:p>
             <a:r>
-              <a:t>sheets by step, and that tally decides which two breaks open the afternoon.</a:t>
+              <a:t>sheets by step; all three chapters run whatever the tally says, and it decides where the trainer</a:t>
+            </a:r>
+          </a:p>
+          <a:p>
+            <a:r>
+              <a:t>lingers and which reserve slide replaces a self-study slide.</a:t>
             </a:r>
           </a:p>
         </p:txBody>
@@ -1008,12 +1013,12 @@
           </a:p>
           <a:p>
             <a:r>
-              <a:t>talking about the method. This picture stays on the second screen, if there is one, for the whole</a:t>
-            </a:r>
-          </a:p>
-          <a:p>
-            <a:r>
-              <a:t>lab.</a:t>
+              <a:t>talking about the method. During the lab only S7, the step names and their minutes, stays on the</a:t>
+            </a:r>
+          </a:p>
+          <a:p>
+            <a:r>
+              <a:t>projector.</a:t>
             </a:r>
           </a:p>
         </p:txBody>
@@ -1158,12 +1163,12 @@
           <a:lstStyle/>
           <a:p>
             <a:r>
-              <a:t>LIVE, 1 minute. The answer is b. Option d is closed by the rules anyway: no other day's notebook is</a:t>
-            </a:r>
-          </a:p>
-          <a:p>
-            <a:r>
-              <a:t>open today, and the reason is that code written for Wednesday's file assumes Wednesday's defects.</a:t>
+              <a:t>LIVE, 1 minute. The answer is b. Option d is closed by the rules anyway: no other notebook is open</a:t>
+            </a:r>
+          </a:p>
+          <a:p>
+            <a:r>
+              <a:t>today, and the reason is that code written for Wednesday's file assumes Wednesday's defects.</a:t>
             </a:r>
           </a:p>
         </p:txBody>
@@ -5304,7 +5309,7 @@
         <p:spPr>
           <a:xfrm>
             <a:off x="530352" y="2843784"/>
-            <a:ext cx="1702765" cy="1422400"/>
+            <a:ext cx="1702765" cy="904240"/>
           </a:xfrm>
           <a:prstGeom prst="roundRect">
             <a:avLst>
@@ -5393,7 +5398,7 @@
         <p:spPr>
           <a:xfrm>
             <a:off x="694944" y="3277870"/>
-            <a:ext cx="1373581" cy="531876"/>
+            <a:ext cx="1373581" cy="201676"/>
           </a:xfrm>
           <a:prstGeom prst="rect">
             <a:avLst/>
@@ -5407,15 +5412,6 @@
           <a:lstStyle/>
           <a:p>
             <a:pPr algn="l"/>
-            <a:r>
-              <a:rPr sz="1000" b="0" i="0">
-                <a:solidFill>
-                  <a:srgbClr val="6B6690"/>
-                </a:solidFill>
-                <a:latin typeface="Calibri"/>
-              </a:rPr>
-              <a:t>Three counts per field, and every mismatch written down.</a:t>
-            </a:r>
           </a:p>
         </p:txBody>
       </p:sp>
@@ -5507,7 +5503,7 @@
         <p:spPr>
           <a:xfrm>
             <a:off x="2415997" y="2843784"/>
-            <a:ext cx="1702765" cy="1422400"/>
+            <a:ext cx="1702765" cy="904240"/>
           </a:xfrm>
           <a:prstGeom prst="roundRect">
             <a:avLst>
@@ -5596,7 +5592,7 @@
         <p:spPr>
           <a:xfrm>
             <a:off x="2580589" y="3277870"/>
-            <a:ext cx="1373581" cy="696976"/>
+            <a:ext cx="1373581" cy="201676"/>
           </a:xfrm>
           <a:prstGeom prst="rect">
             <a:avLst/>
@@ -5610,15 +5606,6 @@
           <a:lstStyle/>
           <a:p>
             <a:pPr algn="l"/>
-            <a:r>
-              <a:rPr sz="1000" b="0" i="0">
-                <a:solidFill>
-                  <a:srgbClr val="6B6690"/>
-                </a:solidFill>
-                <a:latin typeface="Calibri"/>
-              </a:rPr>
-              <a:t>Drop, default, or keep and flag, each with a reason in the log.</a:t>
-            </a:r>
           </a:p>
         </p:txBody>
       </p:sp>
@@ -5710,7 +5697,7 @@
         <p:spPr>
           <a:xfrm>
             <a:off x="4301642" y="2843784"/>
-            <a:ext cx="1702765" cy="1422400"/>
+            <a:ext cx="1702765" cy="904240"/>
           </a:xfrm>
           <a:prstGeom prst="roundRect">
             <a:avLst>
@@ -5799,7 +5786,7 @@
         <p:spPr>
           <a:xfrm>
             <a:off x="4466234" y="3277870"/>
-            <a:ext cx="1373581" cy="531876"/>
+            <a:ext cx="1373581" cy="201676"/>
           </a:xfrm>
           <a:prstGeom prst="rect">
             <a:avLst/>
@@ -5813,15 +5800,6 @@
           <a:lstStyle/>
           <a:p>
             <a:pPr algn="l"/>
-            <a:r>
-              <a:rPr sz="1000" b="0" i="0">
-                <a:solidFill>
-                  <a:srgbClr val="6B6690"/>
-                </a:solidFill>
-                <a:latin typeface="Calibri"/>
-              </a:rPr>
-              <a:t>Counts and rupees, against Finance's control totals.</a:t>
-            </a:r>
           </a:p>
         </p:txBody>
       </p:sp>
@@ -5913,7 +5891,7 @@
         <p:spPr>
           <a:xfrm>
             <a:off x="6187287" y="2843784"/>
-            <a:ext cx="1702765" cy="1422400"/>
+            <a:ext cx="1702765" cy="904240"/>
           </a:xfrm>
           <a:prstGeom prst="roundRect">
             <a:avLst>
@@ -6002,7 +5980,7 @@
         <p:spPr>
           <a:xfrm>
             <a:off x="6351879" y="3277870"/>
-            <a:ext cx="1373581" cy="531876"/>
+            <a:ext cx="1373581" cy="201676"/>
           </a:xfrm>
           <a:prstGeom prst="rect">
             <a:avLst/>
@@ -6016,15 +5994,6 @@
           <a:lstStyle/>
           <a:p>
             <a:pPr algn="l"/>
-            <a:r>
-              <a:rPr sz="1000" b="0" i="0">
-                <a:solidFill>
-                  <a:srgbClr val="6B6690"/>
-                </a:solidFill>
-                <a:latin typeface="Calibri"/>
-              </a:rPr>
-              <a:t>The tree, Q1 against Q2, segment by segment.</a:t>
-            </a:r>
           </a:p>
         </p:txBody>
       </p:sp>
@@ -6116,7 +6085,7 @@
         <p:spPr>
           <a:xfrm>
             <a:off x="8072932" y="2843784"/>
-            <a:ext cx="1702765" cy="1422400"/>
+            <a:ext cx="1702765" cy="904240"/>
           </a:xfrm>
           <a:prstGeom prst="roundRect">
             <a:avLst>
@@ -6205,7 +6174,7 @@
         <p:spPr>
           <a:xfrm>
             <a:off x="8237524" y="3277870"/>
-            <a:ext cx="1373581" cy="531876"/>
+            <a:ext cx="1373581" cy="201676"/>
           </a:xfrm>
           <a:prstGeom prst="rect">
             <a:avLst/>
@@ -6219,15 +6188,6 @@
           <a:lstStyle/>
           <a:p>
             <a:pPr algn="l"/>
-            <a:r>
-              <a:rPr sz="1000" b="0" i="0">
-                <a:solidFill>
-                  <a:srgbClr val="6B6690"/>
-                </a:solidFill>
-                <a:latin typeface="Calibri"/>
-              </a:rPr>
-              <a:t>One shuffle, 2,000 times, on the gap that matters.</a:t>
-            </a:r>
           </a:p>
         </p:txBody>
       </p:sp>
@@ -6319,7 +6279,7 @@
         <p:spPr>
           <a:xfrm>
             <a:off x="9958578" y="2843784"/>
-            <a:ext cx="1702765" cy="1422400"/>
+            <a:ext cx="1702765" cy="904240"/>
           </a:xfrm>
           <a:prstGeom prst="roundRect">
             <a:avLst>
@@ -6408,7 +6368,7 @@
         <p:spPr>
           <a:xfrm>
             <a:off x="10123170" y="3277870"/>
-            <a:ext cx="1373581" cy="366776"/>
+            <a:ext cx="1373581" cy="201676"/>
           </a:xfrm>
           <a:prstGeom prst="rect">
             <a:avLst/>
@@ -6422,15 +6382,6 @@
           <a:lstStyle/>
           <a:p>
             <a:pPr algn="l"/>
-            <a:r>
-              <a:rPr sz="1000" b="0" i="0">
-                <a:solidFill>
-                  <a:srgbClr val="6B6690"/>
-                </a:solidFill>
-                <a:latin typeface="Calibri"/>
-              </a:rPr>
-              <a:t>Claim, evidence, caveat, action.</a:t>
-            </a:r>
           </a:p>
         </p:txBody>
       </p:sp>
@@ -8612,7 +8563,7 @@
                 </a:solidFill>
                 <a:latin typeface="Calibri"/>
               </a:rPr>
-              <a:t>Week 1 Day 5: the week rebuilt alone</a:t>
+              <a:t>Week 1, Day 5. The week, rebuilt alone</a:t>
             </a:r>
           </a:p>
         </p:txBody>
@@ -8926,7 +8877,7 @@
         <p:spPr>
           <a:xfrm>
             <a:off x="530352" y="3903345"/>
-            <a:ext cx="11130991" cy="1380744"/>
+            <a:ext cx="11130991" cy="1639824"/>
           </a:xfrm>
           <a:prstGeom prst="roundRect">
             <a:avLst>
@@ -8985,7 +8936,7 @@
         </p:nvSpPr>
         <p:spPr>
           <a:xfrm>
-            <a:off x="758952" y="4365117"/>
+            <a:off x="758952" y="4494657"/>
             <a:ext cx="457200" cy="457200"/>
           </a:xfrm>
           <a:prstGeom prst="ellipse">
@@ -9037,7 +8988,7 @@
         </p:blipFill>
         <p:spPr>
           <a:xfrm>
-            <a:off x="868680" y="4474845"/>
+            <a:off x="868680" y="4604385"/>
             <a:ext cx="237744" cy="237744"/>
           </a:xfrm>
           <a:prstGeom prst="rect">
@@ -9089,7 +9040,7 @@
         <p:spPr>
           <a:xfrm>
             <a:off x="1399031" y="4269105"/>
-            <a:ext cx="9987991" cy="941832"/>
+            <a:ext cx="9987991" cy="1200912"/>
           </a:xfrm>
           <a:prstGeom prst="rect">
             <a:avLst/>
@@ -9109,7 +9060,7 @@
                 </a:solidFill>
                 <a:latin typeface="Calibri"/>
               </a:rPr>
-              <a:t>Which branch of the revenue tree moved booked revenue from Q1 to Q2, in which segment, and does the number tie to Anand's control totals? A first line with the wrong sign sends Monday's review home with nothing to investigate, while Marketing's Rs 12 crore request waits on the answer.</a:t>
+              <a:t>Which branch of the revenue tree moved booked revenue from Q1 to Q2, in which segment, and does the number tie to Anand's control totals? A first line that does not tie to his books is sent back, and a misread branch sends Monday's effort to the wrong team, while Marketing's Rs 12 crore request waits on the answer.</a:t>
             </a:r>
           </a:p>
         </p:txBody>
@@ -12116,7 +12067,7 @@
         <p:spPr>
           <a:xfrm>
             <a:off x="3559987" y="3303524"/>
-            <a:ext cx="2243251" cy="399796"/>
+            <a:ext cx="2243251" cy="581406"/>
           </a:xfrm>
           <a:prstGeom prst="rect">
             <a:avLst/>
@@ -12137,7 +12088,7 @@
                 </a:solidFill>
                 <a:latin typeface="Calibri"/>
               </a:rPr>
-              <a:t>No earlier notebook, deck or cheat sheet open on any screen.</a:t>
+              <a:t>No other notebook in notebooks/, and no deck or cheat sheet, open on any screen.</a:t>
             </a:r>
           </a:p>
         </p:txBody>
@@ -13893,7 +13844,7 @@
                 </a:solidFill>
                 <a:latin typeface="Calibri"/>
               </a:rPr>
-              <a:t>Week 1 Day 5: the week rebuilt alone</a:t>
+              <a:t>Week 1, Day 5. The week, rebuilt alone</a:t>
             </a:r>
           </a:p>
         </p:txBody>

--- a/content/W01/D5/slides/C2_W01_D05_lab_STUDENT.pptx
+++ b/content/W01/D5/slides/C2_W01_D05_lab_STUDENT.pptx
@@ -1075,7 +1075,7 @@
           </a:p>
           <a:p>
             <a:r>
-              <a:t>rules and the hand-in. Nothing here is new, and the pace matters more than the words.</a:t>
+              <a:t>rules and the hand-in. Nothing here is new, so keep to the ten minutes.</a:t>
             </a:r>
           </a:p>
         </p:txBody>
@@ -9006,7 +9006,7 @@
                 </a:solidFill>
                 <a:latin typeface="Calibri"/>
               </a:rPr>
-              <a:t>the file is new to every model too</a:t>
+              <a:t>no chat model and no autocomplete</a:t>
             </a:r>
           </a:p>
         </p:txBody>
@@ -9241,7 +9241,7 @@
                 </a:solidFill>
                 <a:latin typeface="Calibri"/>
               </a:rPr>
-              <a:t>The step you skipped when the clock ran is the step you do not own yet. Knowing which one it is, this week, costs nothing.</a:t>
+              <a:t>The step you skipped when the clock ran is the step you do not own yet, and this week you find out which one it is with nothing scored.</a:t>
             </a:r>
           </a:p>
         </p:txBody>

--- a/content/W01/D5/slides/C2_W01_D05_lab_STUDENT.pptx
+++ b/content/W01/D5/slides/C2_W01_D05_lab_STUDENT.pptx
@@ -925,7 +925,7 @@
           </a:p>
           <a:p>
             <a:r>
-              <a:t>lingers and which reserve slide replaces a self-study slide.</a:t>
+              <a:t>lingers and which reserve slide runs live.</a:t>
             </a:r>
           </a:p>
         </p:txBody>

--- a/content/W01/D5/slides/C2_W01_D05_lab_STUDENT.pptx
+++ b/content/W01/D5/slides/C2_W01_D05_lab_STUDENT.pptx
@@ -515,7 +515,7 @@
           <a:lstStyle/>
           <a:p>
             <a:r>
-              <a:t>LIVE, one minute. Read Kavya's line aloud and leave it up. Today teaches nothing new: the morning</a:t>
+              <a:t>LIVE, half a minute. Read Kavya's line aloud and leave it up. Today teaches nothing new: the morning</a:t>
             </a:r>
           </a:p>
           <a:p>
@@ -595,7 +595,7 @@
           <a:lstStyle/>
           <a:p>
             <a:r>
-              <a:t>LIVE, 1 minute. Everyone opens both files now and runs the first cell before the clock starts, so a</a:t>
+              <a:t>LIVE, 1 and a half minutes. Everyone opens both files now and runs the first cell before the clock starts, so a</a:t>
             </a:r>
           </a:p>
           <a:p>
@@ -995,7 +995,7 @@
           <a:lstStyle/>
           <a:p>
             <a:r>
-              <a:t>LIVE, 1 minute. Read the day's question once, then the five parts. The first is the morning's</a:t>
+              <a:t>LIVE, half a minute. Read the day's question once, then the five parts. The first is the morning's</a:t>
             </a:r>
           </a:p>
           <a:p>
@@ -1145,7 +1145,7 @@
           <a:lstStyle/>
           <a:p>
             <a:r>
-              <a:t>LIVE, 1 minute. Read who needs the answer and the four questions, then start.</a:t>
+              <a:t>LIVE, half a minute. Read who needs the answer and the four questions, then start.</a:t>
             </a:r>
           </a:p>
         </p:txBody>
@@ -1215,22 +1215,27 @@
           <a:lstStyle/>
           <a:p>
             <a:r>
-              <a:t>LIVE, 2 minutes. Say the metric, who asks and what a wrong number costs, then the four questions on</a:t>
-            </a:r>
-          </a:p>
-          <a:p>
-            <a:r>
-              <a:t>the table from the row: whether the pipeline is yours or the notebook's, which step you reach for</a:t>
-            </a:r>
-          </a:p>
-          <a:p>
-            <a:r>
-              <a:t>first, whether the note survives a hostile question, and what you still cannot do without help. Do</a:t>
-            </a:r>
-          </a:p>
-          <a:p>
-            <a:r>
-              <a:t>not add anything about which step matters most: the lab measures what each person does unprompted.</a:t>
+              <a:t>LIVE, 1 and a half minutes. Say the metric, who asks and what a wrong number costs, then the four</a:t>
+            </a:r>
+          </a:p>
+          <a:p>
+            <a:r>
+              <a:t>questions on the table from the row: whether the pipeline is yours or the notebook's, which step you</a:t>
+            </a:r>
+          </a:p>
+          <a:p>
+            <a:r>
+              <a:t>reach for first, whether the note survives a hostile question, and what you still cannot do without</a:t>
+            </a:r>
+          </a:p>
+          <a:p>
+            <a:r>
+              <a:t>help. Do not add anything about which step matters most: the lab measures what each person does</a:t>
+            </a:r>
+          </a:p>
+          <a:p>
+            <a:r>
+              <a:t>unprompted.</a:t>
             </a:r>
           </a:p>
         </p:txBody>
@@ -1300,17 +1305,12 @@
           <a:lstStyle/>
           <a:p>
             <a:r>
-              <a:t>LIVE, 2 minutes. Walk the six boxes left to right once, naming the day each came from. Then stop</a:t>
-            </a:r>
-          </a:p>
-          <a:p>
-            <a:r>
-              <a:t>talking about the method. During the lab only S9, the step questions and their minutes, stays on</a:t>
-            </a:r>
-          </a:p>
-          <a:p>
-            <a:r>
-              <a:t>the projector.</a:t>
+              <a:t>LIVE, 1 minute. Take letters from three people. Expect some a: it is the instinct under time</a:t>
+            </a:r>
+          </a:p>
+          <a:p>
+            <a:r>
+              <a:t>pressure and the reason a total gets quoted before anybody knows what the file holds.</a:t>
             </a:r>
           </a:p>
         </p:txBody>
@@ -1380,12 +1380,12 @@
           <a:lstStyle/>
           <a:p>
             <a:r>
-              <a:t>LIVE, 2 minutes. Take letters from three people. Expect some a: it is the instinct under time</a:t>
-            </a:r>
-          </a:p>
-          <a:p>
-            <a:r>
-              <a:t>pressure and the reason a total gets quoted before anybody knows what the file holds.</a:t>
+              <a:t>LIVE, 1 minute. The answer is b. Option d is closed by the rules anyway: no other notebook is open</a:t>
+            </a:r>
+          </a:p>
+          <a:p>
+            <a:r>
+              <a:t>today, because code written for Wednesday's file assumes Wednesday's defects.</a:t>
             </a:r>
           </a:p>
         </p:txBody>
@@ -1455,12 +1455,17 @@
           <a:lstStyle/>
           <a:p>
             <a:r>
-              <a:t>LIVE, 1 minute. The answer is b. Option d is closed by the rules anyway: no other notebook is open</a:t>
-            </a:r>
-          </a:p>
-          <a:p>
-            <a:r>
-              <a:t>today, because code written for Wednesday's file assumes Wednesday's defects.</a:t>
+              <a:t>LIVE, 1 and a half minutes. Walk the six boxes left to right once, naming the day each came from.</a:t>
+            </a:r>
+          </a:p>
+          <a:p>
+            <a:r>
+              <a:t>Then stop talking about the method. During the lab only S9, the step questions and their minutes,</a:t>
+            </a:r>
+          </a:p>
+          <a:p>
+            <a:r>
+              <a:t>stays on the projector.</a:t>
             </a:r>
           </a:p>
         </p:txBody>
@@ -5846,7 +5851,7 @@
                 </a:solidFill>
                 <a:latin typeface="Calibri"/>
               </a:rPr>
-              <a:t>Can you take a raw export to a note Anand would sign, alone, in 120 minutes?</a:t>
+              <a:t>Can you take a raw export to a note Finance would sign, alone, in 120 minutes?</a:t>
             </a:r>
           </a:p>
         </p:txBody>
@@ -6404,7 +6409,7 @@
         <p:spPr>
           <a:xfrm>
             <a:off x="530352" y="2843784"/>
-            <a:ext cx="1702765" cy="904240"/>
+            <a:ext cx="1702765" cy="1076960"/>
           </a:xfrm>
           <a:prstGeom prst="roundRect">
             <a:avLst>
@@ -6514,7 +6519,7 @@
                 </a:solidFill>
                 <a:latin typeface="Calibri"/>
               </a:rPr>
-              <a:t>Profile.</a:t>
+              <a:t>Profile every field.</a:t>
             </a:r>
           </a:p>
         </p:txBody>
@@ -6607,7 +6612,7 @@
         <p:spPr>
           <a:xfrm>
             <a:off x="2415997" y="2843784"/>
-            <a:ext cx="1702765" cy="904240"/>
+            <a:ext cx="1702765" cy="1076960"/>
           </a:xfrm>
           <a:prstGeom prst="roundRect">
             <a:avLst>
@@ -6696,7 +6701,7 @@
         <p:spPr>
           <a:xfrm>
             <a:off x="2580589" y="3492500"/>
-            <a:ext cx="1373581" cy="201676"/>
+            <a:ext cx="1373581" cy="366776"/>
           </a:xfrm>
           <a:prstGeom prst="rect">
             <a:avLst/>
@@ -6717,7 +6722,7 @@
                 </a:solidFill>
                 <a:latin typeface="Calibri"/>
               </a:rPr>
-              <a:t>Clean, with a log.</a:t>
+              <a:t>Clean, and log each decision.</a:t>
             </a:r>
           </a:p>
         </p:txBody>
@@ -6810,7 +6815,7 @@
         <p:spPr>
           <a:xfrm>
             <a:off x="4301642" y="2843784"/>
-            <a:ext cx="1702765" cy="904240"/>
+            <a:ext cx="1702765" cy="1076960"/>
           </a:xfrm>
           <a:prstGeom prst="roundRect">
             <a:avLst>
@@ -6899,7 +6904,7 @@
         <p:spPr>
           <a:xfrm>
             <a:off x="4466234" y="3492500"/>
-            <a:ext cx="1373581" cy="201676"/>
+            <a:ext cx="1373581" cy="366776"/>
           </a:xfrm>
           <a:prstGeom prst="rect">
             <a:avLst/>
@@ -6920,7 +6925,7 @@
                 </a:solidFill>
                 <a:latin typeface="Calibri"/>
               </a:rPr>
-              <a:t>Reconcile.</a:t>
+              <a:t>Reconcile to the control file.</a:t>
             </a:r>
           </a:p>
         </p:txBody>
@@ -7013,7 +7018,7 @@
         <p:spPr>
           <a:xfrm>
             <a:off x="6187287" y="2843784"/>
-            <a:ext cx="1702765" cy="904240"/>
+            <a:ext cx="1702765" cy="1076960"/>
           </a:xfrm>
           <a:prstGeom prst="roundRect">
             <a:avLst>
@@ -7102,7 +7107,7 @@
         <p:spPr>
           <a:xfrm>
             <a:off x="6351879" y="3492500"/>
-            <a:ext cx="1373581" cy="201676"/>
+            <a:ext cx="1373581" cy="366776"/>
           </a:xfrm>
           <a:prstGeom prst="rect">
             <a:avLst/>
@@ -7123,7 +7128,7 @@
                 </a:solidFill>
                 <a:latin typeface="Calibri"/>
               </a:rPr>
-              <a:t>Decompose.</a:t>
+              <a:t>Split along the tree.</a:t>
             </a:r>
           </a:p>
         </p:txBody>
@@ -7216,7 +7221,7 @@
         <p:spPr>
           <a:xfrm>
             <a:off x="8072932" y="2843784"/>
-            <a:ext cx="1702765" cy="904240"/>
+            <a:ext cx="1702765" cy="1076960"/>
           </a:xfrm>
           <a:prstGeom prst="roundRect">
             <a:avLst>
@@ -7305,7 +7310,7 @@
         <p:spPr>
           <a:xfrm>
             <a:off x="8237524" y="3492500"/>
-            <a:ext cx="1373581" cy="201676"/>
+            <a:ext cx="1373581" cy="366776"/>
           </a:xfrm>
           <a:prstGeom prst="rect">
             <a:avLst/>
@@ -7326,7 +7331,7 @@
                 </a:solidFill>
                 <a:latin typeface="Calibri"/>
               </a:rPr>
-              <a:t>One shuffle test.</a:t>
+              <a:t>Run one shuffle test.</a:t>
             </a:r>
           </a:p>
         </p:txBody>
@@ -7419,7 +7424,7 @@
         <p:spPr>
           <a:xfrm>
             <a:off x="9958578" y="2843784"/>
-            <a:ext cx="1702765" cy="904240"/>
+            <a:ext cx="1702765" cy="1076960"/>
           </a:xfrm>
           <a:prstGeom prst="roundRect">
             <a:avLst>
@@ -7535,7 +7540,7 @@
                 </a:solidFill>
                 <a:latin typeface="Calibri"/>
               </a:rPr>
-              <a:t>The note.</a:t>
+              <a:t>Write the note.</a:t>
             </a:r>
           </a:p>
         </p:txBody>
@@ -7548,7 +7553,7 @@
         </p:nvSpPr>
         <p:spPr>
           <a:xfrm>
-            <a:off x="530352" y="3930904"/>
+            <a:off x="530352" y="4103624"/>
             <a:ext cx="11130991" cy="807720"/>
           </a:xfrm>
           <a:prstGeom prst="roundRect">
@@ -7596,7 +7601,7 @@
         </p:nvSpPr>
         <p:spPr>
           <a:xfrm>
-            <a:off x="676656" y="4058920"/>
+            <a:off x="676656" y="4231640"/>
             <a:ext cx="45720" cy="551688"/>
           </a:xfrm>
           <a:prstGeom prst="roundRect">
@@ -7642,7 +7647,7 @@
         </p:nvSpPr>
         <p:spPr>
           <a:xfrm>
-            <a:off x="877824" y="4049776"/>
+            <a:off x="877824" y="4222496"/>
             <a:ext cx="10564063" cy="624840"/>
           </a:xfrm>
           <a:prstGeom prst="rect">
@@ -7672,7 +7677,7 @@
                 </a:solidFill>
                 <a:latin typeface="Calibri"/>
               </a:rPr>
-              <a:t>Anand checks the note's first line against his books, and Meera acts on it on Monday. The minutes are a pace; the order of the steps is fixed.</a:t>
+              <a:t>Kavya reads each note the way Anand and Meera will read Monday's, first line against the books. The minutes are a pace, and the order of the steps is fixed.</a:t>
             </a:r>
           </a:p>
         </p:txBody>
@@ -8568,7 +8573,7 @@
                 </a:solidFill>
                 <a:latin typeface="Georgia"/>
               </a:rPr>
-              <a:t>The step the clock took is the step to own</a:t>
+              <a:t>Your TA marks the one step you do not own yet</a:t>
             </a:r>
           </a:p>
         </p:txBody>
@@ -8787,7 +8792,7 @@
                 </a:solidFill>
                 <a:latin typeface="Georgia"/>
               </a:rPr>
-              <a:t>120</a:t>
+              <a:t>1</a:t>
             </a:r>
           </a:p>
         </p:txBody>
@@ -8822,7 +8827,7 @@
                 </a:solidFill>
                 <a:latin typeface="Calibri"/>
               </a:rPr>
-              <a:t>MINUTES</a:t>
+              <a:t>STEP MARKED</a:t>
             </a:r>
           </a:p>
         </p:txBody>
@@ -8857,7 +8862,7 @@
                 </a:solidFill>
                 <a:latin typeface="Calibri"/>
               </a:rPr>
-              <a:t>one pass, observed</a:t>
+              <a:t>the one the clock took from you</a:t>
             </a:r>
           </a:p>
         </p:txBody>
@@ -8971,7 +8976,7 @@
                 </a:solidFill>
                 <a:latin typeface="Calibri"/>
               </a:rPr>
-              <a:t>ASSISTANTS</a:t>
+              <a:t>SCORES</a:t>
             </a:r>
           </a:p>
         </p:txBody>
@@ -9006,7 +9011,7 @@
                 </a:solidFill>
                 <a:latin typeface="Calibri"/>
               </a:rPr>
-              <a:t>no chat model and no autocomplete</a:t>
+              <a:t>nothing goes on a wall</a:t>
             </a:r>
           </a:p>
         </p:txBody>
@@ -11630,7 +11635,7 @@
                 </a:solidFill>
                 <a:latin typeface="Calibri"/>
               </a:rPr>
-              <a:t>Who needs this answer, and which smaller questions lead to it?</a:t>
+              <a:t>Who needs the lab run alone, and which four questions set its terms?</a:t>
             </a:r>
           </a:p>
         </p:txBody>
@@ -11904,7 +11909,7 @@
         <p:spPr>
           <a:xfrm>
             <a:off x="530352" y="3816096"/>
-            <a:ext cx="2645587" cy="904240"/>
+            <a:ext cx="2645587" cy="1076960"/>
           </a:xfrm>
           <a:prstGeom prst="roundRect">
             <a:avLst>
@@ -11993,7 +11998,7 @@
         <p:spPr>
           <a:xfrm>
             <a:off x="694944" y="4250182"/>
-            <a:ext cx="2316403" cy="201676"/>
+            <a:ext cx="2316403" cy="366776"/>
           </a:xfrm>
           <a:prstGeom prst="rect">
             <a:avLst/>
@@ -12014,7 +12019,7 @@
                 </a:solidFill>
                 <a:latin typeface="Calibri"/>
               </a:rPr>
-              <a:t>And on what.</a:t>
+              <a:t>Meera decides, on the note's first line.</a:t>
             </a:r>
           </a:p>
         </p:txBody>
@@ -12107,7 +12112,7 @@
         <p:spPr>
           <a:xfrm>
             <a:off x="3358819" y="3816096"/>
-            <a:ext cx="2645587" cy="904240"/>
+            <a:ext cx="2645587" cy="1076960"/>
           </a:xfrm>
           <a:prstGeom prst="roundRect">
             <a:avLst>
@@ -12182,7 +12187,7 @@
                 </a:solidFill>
                 <a:latin typeface="Calibri"/>
               </a:rPr>
-              <a:t>In what order does it run?</a:t>
+              <a:t>What do you open first?</a:t>
             </a:r>
           </a:p>
         </p:txBody>
@@ -12217,7 +12222,7 @@
                 </a:solidFill>
                 <a:latin typeface="Calibri"/>
               </a:rPr>
-              <a:t>The week's method, one picture.</a:t>
+              <a:t>The first ten minutes set the rest.</a:t>
             </a:r>
           </a:p>
         </p:txBody>
@@ -12310,7 +12315,7 @@
         <p:spPr>
           <a:xfrm>
             <a:off x="6187287" y="3816096"/>
-            <a:ext cx="2645587" cy="904240"/>
+            <a:ext cx="2645587" cy="1076960"/>
           </a:xfrm>
           <a:prstGeom prst="roundRect">
             <a:avLst>
@@ -12385,7 +12390,7 @@
                 </a:solidFill>
                 <a:latin typeface="Calibri"/>
               </a:rPr>
-              <a:t>What do you open first?</a:t>
+              <a:t>In what order does it run?</a:t>
             </a:r>
           </a:p>
         </p:txBody>
@@ -12399,7 +12404,7 @@
         <p:spPr>
           <a:xfrm>
             <a:off x="6351879" y="4250182"/>
-            <a:ext cx="2316403" cy="201676"/>
+            <a:ext cx="2316403" cy="366776"/>
           </a:xfrm>
           <a:prstGeom prst="rect">
             <a:avLst/>
@@ -12420,7 +12425,7 @@
                 </a:solidFill>
                 <a:latin typeface="Calibri"/>
               </a:rPr>
-              <a:t>The first ten minutes.</a:t>
+              <a:t>The week's method has one fixed order.</a:t>
             </a:r>
           </a:p>
         </p:txBody>
@@ -12513,7 +12518,7 @@
         <p:spPr>
           <a:xfrm>
             <a:off x="9015755" y="3816096"/>
-            <a:ext cx="2645587" cy="904240"/>
+            <a:ext cx="2645587" cy="1076960"/>
           </a:xfrm>
           <a:prstGeom prst="roundRect">
             <a:avLst>
@@ -12608,7 +12613,7 @@
         <p:spPr>
           <a:xfrm>
             <a:off x="9180347" y="4250182"/>
-            <a:ext cx="2316403" cy="201676"/>
+            <a:ext cx="2316403" cy="366776"/>
           </a:xfrm>
           <a:prstGeom prst="rect">
             <a:avLst/>
@@ -12629,7 +12634,7 @@
                 </a:solidFill>
                 <a:latin typeface="Calibri"/>
               </a:rPr>
-              <a:t>The rules and the hand-in.</a:t>
+              <a:t>The rules decide what you may open and hand in.</a:t>
             </a:r>
           </a:p>
         </p:txBody>
@@ -13028,7 +13033,7 @@
                 </a:solidFill>
                 <a:latin typeface="Georgia"/>
               </a:rPr>
-              <a:t>Monday's room decides on what you can run alone</a:t>
+              <a:t>Meera decides Monday on what you can run alone</a:t>
             </a:r>
           </a:p>
         </p:txBody>
@@ -13084,7 +13089,7 @@
         </p:blipFill>
         <p:spPr>
           <a:xfrm>
-            <a:off x="780897" y="1847850"/>
+            <a:off x="780897" y="1956816"/>
             <a:ext cx="10629900" cy="2400300"/>
           </a:xfrm>
           <a:prstGeom prst="rect">
@@ -13100,8 +13105,8 @@
         </p:nvSpPr>
         <p:spPr>
           <a:xfrm>
-            <a:off x="530352" y="4394454"/>
-            <a:ext cx="11130991" cy="1639824"/>
+            <a:off x="530352" y="4503420"/>
+            <a:ext cx="11130991" cy="1380744"/>
           </a:xfrm>
           <a:prstGeom prst="roundRect">
             <a:avLst>
@@ -13160,7 +13165,7 @@
         </p:nvSpPr>
         <p:spPr>
           <a:xfrm>
-            <a:off x="758952" y="4985766"/>
+            <a:off x="758952" y="4965192"/>
             <a:ext cx="457200" cy="457200"/>
           </a:xfrm>
           <a:prstGeom prst="ellipse">
@@ -13212,7 +13217,7 @@
         </p:blipFill>
         <p:spPr>
           <a:xfrm>
-            <a:off x="868680" y="5095494"/>
+            <a:off x="868680" y="5074920"/>
             <a:ext cx="237744" cy="237744"/>
           </a:xfrm>
           <a:prstGeom prst="rect">
@@ -13228,7 +13233,7 @@
         </p:nvSpPr>
         <p:spPr>
           <a:xfrm>
-            <a:off x="1399031" y="4540758"/>
+            <a:off x="1399031" y="4649724"/>
             <a:ext cx="9987991" cy="160401"/>
           </a:xfrm>
           <a:prstGeom prst="rect">
@@ -13263,8 +13268,8 @@
         </p:nvSpPr>
         <p:spPr>
           <a:xfrm>
-            <a:off x="1399031" y="4760214"/>
-            <a:ext cx="9987991" cy="1200912"/>
+            <a:off x="1399031" y="4869180"/>
+            <a:ext cx="9987991" cy="941832"/>
           </a:xfrm>
           <a:prstGeom prst="rect">
             <a:avLst/>
@@ -13284,7 +13289,7 @@
                 </a:solidFill>
                 <a:latin typeface="Calibri"/>
               </a:rPr>
-              <a:t>Which branch of the revenue tree moved booked revenue from Q1 to Q2, in which segment, and does the number tie to Anand's control totals? A first line that does not tie to his books is sent back, and a misread branch sends Monday's effort to the wrong team, while Marketing's Rs 12 crore request waits on the answer.</a:t>
+              <a:t>From Q1 to Q2 in this export, which branch of the revenue tree moved, in which segment, and do your numbers tie to Finance's control totals? Write it as you would write it to Meera, since on Monday a first line that does not tie to Anand's books is sent back.</a:t>
             </a:r>
           </a:p>
         </p:txBody>
@@ -13683,7 +13688,7 @@
                 </a:solidFill>
                 <a:latin typeface="Georgia"/>
               </a:rPr>
-              <a:t>Six steps, each built on a day of this week</a:t>
+              <a:t>Question: what do you open first on a fresh export?</a:t>
             </a:r>
           </a:p>
         </p:txBody>
@@ -13718,87 +13723,74 @@
                 </a:solidFill>
                 <a:latin typeface="Calibri"/>
               </a:rPr>
-              <a:t>In what order does the week's method run, and why that order?</a:t>
-            </a:r>
-          </a:p>
-        </p:txBody>
-      </p:sp>
-      <p:pic>
-        <p:nvPicPr>
-          <p:cNvPr id="9" name="mermaid diagram" descr="600f677d232151b1.png"/>
-          <p:cNvPicPr>
-            <a:picLocks noChangeAspect="1"/>
-          </p:cNvPicPr>
-          <p:nvPr/>
-        </p:nvPicPr>
-        <p:blipFill>
-          <a:blip r:embed="rId5"/>
-          <a:stretch>
-            <a:fillRect/>
-          </a:stretch>
-        </p:blipFill>
+              <a:t>Two hours, a raw file and a stakeholder waiting: where do the first ten minutes go?</a:t>
+            </a:r>
+          </a:p>
+        </p:txBody>
+      </p:sp>
+      <p:sp>
+        <p:nvSpPr>
+          <p:cNvPr id="9" name="Rounded Rectangle 8"/>
+          <p:cNvSpPr/>
+          <p:nvPr/>
+        </p:nvSpPr>
         <p:spPr>
           <a:xfrm>
             <a:off x="530352" y="1956816"/>
-            <a:ext cx="11130991" cy="937450"/>
-          </a:xfrm>
-          <a:prstGeom prst="rect">
-            <a:avLst/>
-          </a:prstGeom>
-        </p:spPr>
-      </p:pic>
-      <p:sp>
-        <p:nvSpPr>
-          <p:cNvPr id="10" name="TextBox 9"/>
-          <p:cNvSpPr txBox="1"/>
-          <p:nvPr/>
-        </p:nvSpPr>
-        <p:spPr>
-          <a:xfrm>
-            <a:off x="530352" y="3040570"/>
-            <a:ext cx="11130991" cy="1048512"/>
-          </a:xfrm>
-          <a:prstGeom prst="rect">
-            <a:avLst/>
-          </a:prstGeom>
-          <a:noFill/>
-        </p:spPr>
-        <p:txBody>
-          <a:bodyPr wrap="square" anchor="t" lIns="0" rIns="0" tIns="0" bIns="0">
-            <a:spAutoFit/>
-          </a:bodyPr>
-          <a:lstStyle/>
-          <a:p>
-            <a:pPr>
-              <a:spcAft>
-                <a:spcPts val="800"/>
-              </a:spcAft>
-            </a:pPr>
-            <a:r>
-              <a:rPr sz="1600" b="0" i="0">
-                <a:solidFill>
-                  <a:srgbClr val="1A1440"/>
-                </a:solidFill>
-                <a:latin typeface="Calibri"/>
-              </a:rPr>
-              <a:t>Each step answers a question the next one depends on: whether the file is what it claims, which rows count, whether the clean data is still the same data, which branch moved, whether chance could do it, and what Meera should do.</a:t>
-            </a:r>
-          </a:p>
-        </p:txBody>
-      </p:sp>
-      <p:sp>
-        <p:nvSpPr>
-          <p:cNvPr id="11" name="Oval 10"/>
+            <a:ext cx="11130991" cy="1074420"/>
+          </a:xfrm>
+          <a:prstGeom prst="roundRect">
+            <a:avLst>
+              <a:gd name="adj" fmla="val 8000"/>
+            </a:avLst>
+          </a:prstGeom>
+          <a:solidFill>
+            <a:srgbClr val="F7F5FD"/>
+          </a:solidFill>
+          <a:ln w="9525">
+            <a:solidFill>
+              <a:srgbClr val="E4E1F1"/>
+            </a:solidFill>
+          </a:ln>
+          <a:effectLst/>
+        </p:spPr>
+        <p:style>
+          <a:lnRef idx="1">
+            <a:schemeClr val="accent1"/>
+          </a:lnRef>
+          <a:fillRef idx="3">
+            <a:schemeClr val="accent1"/>
+          </a:fillRef>
+          <a:effectRef idx="2">
+            <a:schemeClr val="accent1"/>
+          </a:effectRef>
+          <a:fontRef idx="minor">
+            <a:schemeClr val="lt1"/>
+          </a:fontRef>
+        </p:style>
+        <p:txBody>
+          <a:bodyPr rtlCol="0" anchor="ctr" wrap="square"/>
+          <a:lstStyle/>
+          <a:p>
+            <a:pPr algn="ctr"/>
+          </a:p>
+        </p:txBody>
+      </p:sp>
+      <p:sp>
+        <p:nvSpPr>
+          <p:cNvPr id="10" name="Rounded Rectangle 9"/>
           <p:cNvSpPr/>
           <p:nvPr/>
         </p:nvSpPr>
         <p:spPr>
           <a:xfrm>
-            <a:off x="530352" y="6492240"/>
-            <a:ext cx="64008" cy="64008"/>
-          </a:xfrm>
-          <a:prstGeom prst="ellipse">
-            <a:avLst/>
+            <a:off x="676656" y="2084832"/>
+            <a:ext cx="45720" cy="818388"/>
+          </a:xfrm>
+          <a:prstGeom prst="roundRect">
+            <a:avLst>
+              <a:gd name="adj" fmla="val 50000"/>
+            </a:avLst>
           </a:prstGeom>
           <a:solidFill>
             <a:srgbClr val="5B3FD6"/>
@@ -13832,7 +13824,94 @@
       </p:sp>
       <p:sp>
         <p:nvSpPr>
-          <p:cNvPr id="12" name="TextBox 11"/>
+          <p:cNvPr id="11" name="TextBox 10"/>
+          <p:cNvSpPr txBox="1"/>
+          <p:nvPr/>
+        </p:nvSpPr>
+        <p:spPr>
+          <a:xfrm>
+            <a:off x="877824" y="2075688"/>
+            <a:ext cx="10564063" cy="891540"/>
+          </a:xfrm>
+          <a:prstGeom prst="rect">
+            <a:avLst/>
+          </a:prstGeom>
+          <a:noFill/>
+        </p:spPr>
+        <p:txBody>
+          <a:bodyPr wrap="square" anchor="ctr" lIns="0" rIns="0" tIns="0" bIns="0">
+            <a:spAutoFit/>
+          </a:bodyPr>
+          <a:lstStyle/>
+          <a:p>
+            <a:r>
+              <a:rPr sz="1500" b="1">
+                <a:solidFill>
+                  <a:srgbClr val="5B3FD6"/>
+                </a:solidFill>
+                <a:latin typeface="Calibri"/>
+              </a:rPr>
+              <a:t>Question. </a:t>
+            </a:r>
+            <a:r>
+              <a:rPr sz="1500" b="0" i="0">
+                <a:solidFill>
+                  <a:srgbClr val="1A1440"/>
+                </a:solidFill>
+                <a:latin typeface="Calibri"/>
+              </a:rPr>
+              <a:t>Choose one: a) the quarter totals, so Meera has a number early; b) a profile of every field, before any number; c) the segment split, because that is where last week's finding sat; d) the notebook from Wednesday, to reuse its cleaning code.</a:t>
+            </a:r>
+          </a:p>
+        </p:txBody>
+      </p:sp>
+      <p:sp>
+        <p:nvSpPr>
+          <p:cNvPr id="12" name="Oval 11"/>
+          <p:cNvSpPr/>
+          <p:nvPr/>
+        </p:nvSpPr>
+        <p:spPr>
+          <a:xfrm>
+            <a:off x="530352" y="6492240"/>
+            <a:ext cx="64008" cy="64008"/>
+          </a:xfrm>
+          <a:prstGeom prst="ellipse">
+            <a:avLst/>
+          </a:prstGeom>
+          <a:solidFill>
+            <a:srgbClr val="5B3FD6"/>
+          </a:solidFill>
+          <a:ln>
+            <a:noFill/>
+          </a:ln>
+          <a:effectLst/>
+        </p:spPr>
+        <p:style>
+          <a:lnRef idx="1">
+            <a:schemeClr val="accent1"/>
+          </a:lnRef>
+          <a:fillRef idx="3">
+            <a:schemeClr val="accent1"/>
+          </a:fillRef>
+          <a:effectRef idx="2">
+            <a:schemeClr val="accent1"/>
+          </a:effectRef>
+          <a:fontRef idx="minor">
+            <a:schemeClr val="lt1"/>
+          </a:fontRef>
+        </p:style>
+        <p:txBody>
+          <a:bodyPr rtlCol="0" anchor="ctr" wrap="square"/>
+          <a:lstStyle/>
+          <a:p>
+            <a:pPr algn="ctr"/>
+          </a:p>
+        </p:txBody>
+      </p:sp>
+      <p:sp>
+        <p:nvSpPr>
+          <p:cNvPr id="13" name="TextBox 12"/>
           <p:cNvSpPr txBox="1"/>
           <p:nvPr/>
         </p:nvSpPr>
@@ -13867,7 +13946,7 @@
       </p:sp>
       <p:sp>
         <p:nvSpPr>
-          <p:cNvPr id="13" name="Oval 12"/>
+          <p:cNvPr id="14" name="Oval 13"/>
           <p:cNvSpPr/>
           <p:nvPr/>
         </p:nvSpPr>
@@ -13911,7 +13990,7 @@
       </p:sp>
       <p:sp>
         <p:nvSpPr>
-          <p:cNvPr id="14" name="TextBox 13"/>
+          <p:cNvPr id="15" name="TextBox 14"/>
           <p:cNvSpPr txBox="1"/>
           <p:nvPr/>
         </p:nvSpPr>
@@ -13946,7 +14025,7 @@
       </p:sp>
       <p:sp>
         <p:nvSpPr>
-          <p:cNvPr id="15" name="TextBox 14"/>
+          <p:cNvPr id="16" name="TextBox 15"/>
           <p:cNvSpPr txBox="1"/>
           <p:nvPr/>
         </p:nvSpPr>
@@ -14180,7 +14259,7 @@
                 </a:solidFill>
                 <a:latin typeface="Georgia"/>
               </a:rPr>
-              <a:t>Question: what do you open first on a fresh export?</a:t>
+              <a:t>Answer: a profile, before any number</a:t>
             </a:r>
           </a:p>
         </p:txBody>
@@ -14215,25 +14294,472 @@
                 </a:solidFill>
                 <a:latin typeface="Calibri"/>
               </a:rPr>
-              <a:t>Two hours, a raw file and a stakeholder waiting: where do the first ten minutes go?</a:t>
-            </a:r>
-          </a:p>
-        </p:txBody>
-      </p:sp>
-      <p:sp>
-        <p:nvSpPr>
-          <p:cNvPr id="9" name="Rounded Rectangle 8"/>
+              <a:t>Why does the profile come before any total?</a:t>
+            </a:r>
+          </a:p>
+        </p:txBody>
+      </p:sp>
+      <p:sp>
+        <p:nvSpPr>
+          <p:cNvPr id="9" name="TextBox 8"/>
+          <p:cNvSpPr txBox="1"/>
+          <p:nvPr/>
+        </p:nvSpPr>
+        <p:spPr>
+          <a:xfrm>
+            <a:off x="530352" y="1956816"/>
+            <a:ext cx="3527450" cy="698500"/>
+          </a:xfrm>
+          <a:prstGeom prst="rect">
+            <a:avLst/>
+          </a:prstGeom>
+          <a:noFill/>
+        </p:spPr>
+        <p:txBody>
+          <a:bodyPr wrap="square" anchor="t" lIns="0" rIns="0" tIns="0" bIns="0">
+            <a:spAutoFit/>
+          </a:bodyPr>
+          <a:lstStyle/>
+          <a:p>
+            <a:pPr algn="l"/>
+            <a:r>
+              <a:rPr sz="4400" b="0" i="0">
+                <a:solidFill>
+                  <a:srgbClr val="5B3FD6"/>
+                </a:solidFill>
+                <a:latin typeface="Georgia"/>
+              </a:rPr>
+              <a:t>3</a:t>
+            </a:r>
+          </a:p>
+        </p:txBody>
+      </p:sp>
+      <p:sp>
+        <p:nvSpPr>
+          <p:cNvPr id="10" name="TextBox 9"/>
+          <p:cNvSpPr txBox="1"/>
+          <p:nvPr/>
+        </p:nvSpPr>
+        <p:spPr>
+          <a:xfrm>
+            <a:off x="530352" y="2691892"/>
+            <a:ext cx="3527450" cy="168656"/>
+          </a:xfrm>
+          <a:prstGeom prst="rect">
+            <a:avLst/>
+          </a:prstGeom>
+          <a:noFill/>
+        </p:spPr>
+        <p:txBody>
+          <a:bodyPr wrap="square" anchor="t" lIns="0" rIns="0" tIns="0" bIns="0">
+            <a:spAutoFit/>
+          </a:bodyPr>
+          <a:lstStyle/>
+          <a:p>
+            <a:pPr algn="l"/>
+            <a:r>
+              <a:rPr sz="800" b="1" i="0" spc="250">
+                <a:solidFill>
+                  <a:srgbClr val="1A0F5C"/>
+                </a:solidFill>
+                <a:latin typeface="Calibri"/>
+              </a:rPr>
+              <a:t>COUNTS PER FIELD</a:t>
+            </a:r>
+          </a:p>
+        </p:txBody>
+      </p:sp>
+      <p:sp>
+        <p:nvSpPr>
+          <p:cNvPr id="11" name="TextBox 10"/>
+          <p:cNvSpPr txBox="1"/>
+          <p:nvPr/>
+        </p:nvSpPr>
+        <p:spPr>
+          <a:xfrm>
+            <a:off x="530352" y="2893060"/>
+            <a:ext cx="3527450" cy="193421"/>
+          </a:xfrm>
+          <a:prstGeom prst="rect">
+            <a:avLst/>
+          </a:prstGeom>
+          <a:noFill/>
+        </p:spPr>
+        <p:txBody>
+          <a:bodyPr wrap="square" anchor="t" lIns="0" rIns="0" tIns="0" bIns="0">
+            <a:spAutoFit/>
+          </a:bodyPr>
+          <a:lstStyle/>
+          <a:p>
+            <a:pPr algn="l"/>
+            <a:r>
+              <a:rPr sz="950" b="0" i="0">
+                <a:solidFill>
+                  <a:srgbClr val="6B6690"/>
+                </a:solidFill>
+                <a:latin typeface="Calibri"/>
+              </a:rPr>
+              <a:t>present, convertible, distinct</a:t>
+            </a:r>
+          </a:p>
+        </p:txBody>
+      </p:sp>
+      <p:sp>
+        <p:nvSpPr>
+          <p:cNvPr id="12" name="Rectangle 11"/>
           <p:cNvSpPr/>
           <p:nvPr/>
         </p:nvSpPr>
         <p:spPr>
           <a:xfrm>
-            <a:off x="530352" y="1956816"/>
-            <a:ext cx="11130991" cy="1074420"/>
+            <a:off x="530352" y="3145536"/>
+            <a:ext cx="3527450" cy="10972"/>
+          </a:xfrm>
+          <a:prstGeom prst="rect">
+            <a:avLst/>
+          </a:prstGeom>
+          <a:solidFill>
+            <a:srgbClr val="E4E1F1"/>
+          </a:solidFill>
+          <a:ln>
+            <a:noFill/>
+          </a:ln>
+          <a:effectLst/>
+        </p:spPr>
+        <p:style>
+          <a:lnRef idx="1">
+            <a:schemeClr val="accent1"/>
+          </a:lnRef>
+          <a:fillRef idx="3">
+            <a:schemeClr val="accent1"/>
+          </a:fillRef>
+          <a:effectRef idx="2">
+            <a:schemeClr val="accent1"/>
+          </a:effectRef>
+          <a:fontRef idx="minor">
+            <a:schemeClr val="lt1"/>
+          </a:fontRef>
+        </p:style>
+        <p:txBody>
+          <a:bodyPr rtlCol="0" anchor="ctr" wrap="square"/>
+          <a:lstStyle/>
+          <a:p>
+            <a:pPr algn="ctr"/>
+          </a:p>
+        </p:txBody>
+      </p:sp>
+      <p:sp>
+        <p:nvSpPr>
+          <p:cNvPr id="13" name="TextBox 12"/>
+          <p:cNvSpPr txBox="1"/>
+          <p:nvPr/>
+        </p:nvSpPr>
+        <p:spPr>
+          <a:xfrm>
+            <a:off x="4332122" y="1956816"/>
+            <a:ext cx="3527450" cy="698500"/>
+          </a:xfrm>
+          <a:prstGeom prst="rect">
+            <a:avLst/>
+          </a:prstGeom>
+          <a:noFill/>
+        </p:spPr>
+        <p:txBody>
+          <a:bodyPr wrap="square" anchor="t" lIns="0" rIns="0" tIns="0" bIns="0">
+            <a:spAutoFit/>
+          </a:bodyPr>
+          <a:lstStyle/>
+          <a:p>
+            <a:pPr algn="l"/>
+            <a:r>
+              <a:rPr sz="4400" b="0" i="0">
+                <a:solidFill>
+                  <a:srgbClr val="5B3FD6"/>
+                </a:solidFill>
+                <a:latin typeface="Georgia"/>
+              </a:rPr>
+              <a:t>1</a:t>
+            </a:r>
+          </a:p>
+        </p:txBody>
+      </p:sp>
+      <p:sp>
+        <p:nvSpPr>
+          <p:cNvPr id="14" name="TextBox 13"/>
+          <p:cNvSpPr txBox="1"/>
+          <p:nvPr/>
+        </p:nvSpPr>
+        <p:spPr>
+          <a:xfrm>
+            <a:off x="4332122" y="2691892"/>
+            <a:ext cx="3527450" cy="168656"/>
+          </a:xfrm>
+          <a:prstGeom prst="rect">
+            <a:avLst/>
+          </a:prstGeom>
+          <a:noFill/>
+        </p:spPr>
+        <p:txBody>
+          <a:bodyPr wrap="square" anchor="t" lIns="0" rIns="0" tIns="0" bIns="0">
+            <a:spAutoFit/>
+          </a:bodyPr>
+          <a:lstStyle/>
+          <a:p>
+            <a:pPr algn="l"/>
+            <a:r>
+              <a:rPr sz="800" b="1" i="0" spc="250">
+                <a:solidFill>
+                  <a:srgbClr val="1A0F5C"/>
+                </a:solidFill>
+                <a:latin typeface="Calibri"/>
+              </a:rPr>
+              <a:t>FINDING PER MISMATCH</a:t>
+            </a:r>
+          </a:p>
+        </p:txBody>
+      </p:sp>
+      <p:sp>
+        <p:nvSpPr>
+          <p:cNvPr id="15" name="TextBox 14"/>
+          <p:cNvSpPr txBox="1"/>
+          <p:nvPr/>
+        </p:nvSpPr>
+        <p:spPr>
+          <a:xfrm>
+            <a:off x="4332122" y="2893060"/>
+            <a:ext cx="3527450" cy="193421"/>
+          </a:xfrm>
+          <a:prstGeom prst="rect">
+            <a:avLst/>
+          </a:prstGeom>
+          <a:noFill/>
+        </p:spPr>
+        <p:txBody>
+          <a:bodyPr wrap="square" anchor="t" lIns="0" rIns="0" tIns="0" bIns="0">
+            <a:spAutoFit/>
+          </a:bodyPr>
+          <a:lstStyle/>
+          <a:p>
+            <a:pPr algn="l"/>
+            <a:r>
+              <a:rPr sz="950" b="0" i="0">
+                <a:solidFill>
+                  <a:srgbClr val="6B6690"/>
+                </a:solidFill>
+                <a:latin typeface="Calibri"/>
+              </a:rPr>
+              <a:t>each count that disagrees with the field</a:t>
+            </a:r>
+          </a:p>
+        </p:txBody>
+      </p:sp>
+      <p:sp>
+        <p:nvSpPr>
+          <p:cNvPr id="16" name="Rectangle 15"/>
+          <p:cNvSpPr/>
+          <p:nvPr/>
+        </p:nvSpPr>
+        <p:spPr>
+          <a:xfrm>
+            <a:off x="4332122" y="3145536"/>
+            <a:ext cx="3527450" cy="10972"/>
+          </a:xfrm>
+          <a:prstGeom prst="rect">
+            <a:avLst/>
+          </a:prstGeom>
+          <a:solidFill>
+            <a:srgbClr val="E4E1F1"/>
+          </a:solidFill>
+          <a:ln>
+            <a:noFill/>
+          </a:ln>
+          <a:effectLst/>
+        </p:spPr>
+        <p:style>
+          <a:lnRef idx="1">
+            <a:schemeClr val="accent1"/>
+          </a:lnRef>
+          <a:fillRef idx="3">
+            <a:schemeClr val="accent1"/>
+          </a:fillRef>
+          <a:effectRef idx="2">
+            <a:schemeClr val="accent1"/>
+          </a:effectRef>
+          <a:fontRef idx="minor">
+            <a:schemeClr val="lt1"/>
+          </a:fontRef>
+        </p:style>
+        <p:txBody>
+          <a:bodyPr rtlCol="0" anchor="ctr" wrap="square"/>
+          <a:lstStyle/>
+          <a:p>
+            <a:pPr algn="ctr"/>
+          </a:p>
+        </p:txBody>
+      </p:sp>
+      <p:sp>
+        <p:nvSpPr>
+          <p:cNvPr id="17" name="TextBox 16"/>
+          <p:cNvSpPr txBox="1"/>
+          <p:nvPr/>
+        </p:nvSpPr>
+        <p:spPr>
+          <a:xfrm>
+            <a:off x="8133892" y="1956816"/>
+            <a:ext cx="3527450" cy="698500"/>
+          </a:xfrm>
+          <a:prstGeom prst="rect">
+            <a:avLst/>
+          </a:prstGeom>
+          <a:noFill/>
+        </p:spPr>
+        <p:txBody>
+          <a:bodyPr wrap="square" anchor="t" lIns="0" rIns="0" tIns="0" bIns="0">
+            <a:spAutoFit/>
+          </a:bodyPr>
+          <a:lstStyle/>
+          <a:p>
+            <a:pPr algn="l"/>
+            <a:r>
+              <a:rPr sz="4400" b="0" i="0">
+                <a:solidFill>
+                  <a:srgbClr val="5B3FD6"/>
+                </a:solidFill>
+                <a:latin typeface="Georgia"/>
+              </a:rPr>
+              <a:t>0</a:t>
+            </a:r>
+          </a:p>
+        </p:txBody>
+      </p:sp>
+      <p:sp>
+        <p:nvSpPr>
+          <p:cNvPr id="18" name="TextBox 17"/>
+          <p:cNvSpPr txBox="1"/>
+          <p:nvPr/>
+        </p:nvSpPr>
+        <p:spPr>
+          <a:xfrm>
+            <a:off x="8133892" y="2691892"/>
+            <a:ext cx="3527450" cy="168656"/>
+          </a:xfrm>
+          <a:prstGeom prst="rect">
+            <a:avLst/>
+          </a:prstGeom>
+          <a:noFill/>
+        </p:spPr>
+        <p:txBody>
+          <a:bodyPr wrap="square" anchor="t" lIns="0" rIns="0" tIns="0" bIns="0">
+            <a:spAutoFit/>
+          </a:bodyPr>
+          <a:lstStyle/>
+          <a:p>
+            <a:pPr algn="l"/>
+            <a:r>
+              <a:rPr sz="800" b="1" i="0" spc="250">
+                <a:solidFill>
+                  <a:srgbClr val="1A0F5C"/>
+                </a:solidFill>
+                <a:latin typeface="Calibri"/>
+              </a:rPr>
+              <a:t>NUMBERS QUOTED</a:t>
+            </a:r>
+          </a:p>
+        </p:txBody>
+      </p:sp>
+      <p:sp>
+        <p:nvSpPr>
+          <p:cNvPr id="19" name="TextBox 18"/>
+          <p:cNvSpPr txBox="1"/>
+          <p:nvPr/>
+        </p:nvSpPr>
+        <p:spPr>
+          <a:xfrm>
+            <a:off x="8133892" y="2893060"/>
+            <a:ext cx="3527450" cy="193421"/>
+          </a:xfrm>
+          <a:prstGeom prst="rect">
+            <a:avLst/>
+          </a:prstGeom>
+          <a:noFill/>
+        </p:spPr>
+        <p:txBody>
+          <a:bodyPr wrap="square" anchor="t" lIns="0" rIns="0" tIns="0" bIns="0">
+            <a:spAutoFit/>
+          </a:bodyPr>
+          <a:lstStyle/>
+          <a:p>
+            <a:pPr algn="l"/>
+            <a:r>
+              <a:rPr sz="950" b="0" i="0">
+                <a:solidFill>
+                  <a:srgbClr val="6B6690"/>
+                </a:solidFill>
+                <a:latin typeface="Calibri"/>
+              </a:rPr>
+              <a:t>until the profile is read</a:t>
+            </a:r>
+          </a:p>
+        </p:txBody>
+      </p:sp>
+      <p:sp>
+        <p:nvSpPr>
+          <p:cNvPr id="20" name="Rectangle 19"/>
+          <p:cNvSpPr/>
+          <p:nvPr/>
+        </p:nvSpPr>
+        <p:spPr>
+          <a:xfrm>
+            <a:off x="8133892" y="3145536"/>
+            <a:ext cx="3527450" cy="10972"/>
+          </a:xfrm>
+          <a:prstGeom prst="rect">
+            <a:avLst/>
+          </a:prstGeom>
+          <a:solidFill>
+            <a:srgbClr val="E4E1F1"/>
+          </a:solidFill>
+          <a:ln>
+            <a:noFill/>
+          </a:ln>
+          <a:effectLst/>
+        </p:spPr>
+        <p:style>
+          <a:lnRef idx="1">
+            <a:schemeClr val="accent1"/>
+          </a:lnRef>
+          <a:fillRef idx="3">
+            <a:schemeClr val="accent1"/>
+          </a:fillRef>
+          <a:effectRef idx="2">
+            <a:schemeClr val="accent1"/>
+          </a:effectRef>
+          <a:fontRef idx="minor">
+            <a:schemeClr val="lt1"/>
+          </a:fontRef>
+        </p:style>
+        <p:txBody>
+          <a:bodyPr rtlCol="0" anchor="ctr" wrap="square"/>
+          <a:lstStyle/>
+          <a:p>
+            <a:pPr algn="ctr"/>
+          </a:p>
+        </p:txBody>
+      </p:sp>
+      <p:sp>
+        <p:nvSpPr>
+          <p:cNvPr id="21" name="Rounded Rectangle 20"/>
+          <p:cNvSpPr/>
+          <p:nvPr/>
+        </p:nvSpPr>
+        <p:spPr>
+          <a:xfrm>
+            <a:off x="530352" y="3419856"/>
+            <a:ext cx="11130991" cy="1121664"/>
           </a:xfrm>
           <a:prstGeom prst="roundRect">
             <a:avLst>
-              <a:gd name="adj" fmla="val 8000"/>
+              <a:gd name="adj" fmla="val 5000"/>
             </a:avLst>
           </a:prstGeom>
           <a:solidFill>
@@ -14244,7 +14770,13 @@
               <a:srgbClr val="E4E1F1"/>
             </a:solidFill>
           </a:ln>
-          <a:effectLst/>
+          <a:effectLst>
+            <a:outerShdw blurRad="76200" dist="19050" dir="5400000" algn="bl" rotWithShape="0">
+              <a:srgbClr val="1A0F5C">
+                <a:alpha val="12000"/>
+              </a:srgbClr>
+            </a:outerShdw>
+          </a:effectLst>
         </p:spPr>
         <p:style>
           <a:lnRef idx="1">
@@ -14270,19 +14802,17 @@
       </p:sp>
       <p:sp>
         <p:nvSpPr>
-          <p:cNvPr id="10" name="Rounded Rectangle 9"/>
+          <p:cNvPr id="22" name="Oval 21"/>
           <p:cNvSpPr/>
           <p:nvPr/>
         </p:nvSpPr>
         <p:spPr>
           <a:xfrm>
-            <a:off x="676656" y="2084832"/>
-            <a:ext cx="45720" cy="818388"/>
-          </a:xfrm>
-          <a:prstGeom prst="roundRect">
-            <a:avLst>
-              <a:gd name="adj" fmla="val 50000"/>
-            </a:avLst>
+            <a:off x="758952" y="3752088"/>
+            <a:ext cx="457200" cy="457200"/>
+          </a:xfrm>
+          <a:prstGeom prst="ellipse">
+            <a:avLst/>
           </a:prstGeom>
           <a:solidFill>
             <a:srgbClr val="5B3FD6"/>
@@ -14314,37 +14844,87 @@
           </a:p>
         </p:txBody>
       </p:sp>
-      <p:sp>
-        <p:nvSpPr>
-          <p:cNvPr id="11" name="TextBox 10"/>
-          <p:cNvSpPr txBox="1"/>
-          <p:nvPr/>
-        </p:nvSpPr>
-        <p:spPr>
-          <a:xfrm>
-            <a:off x="877824" y="2075688"/>
-            <a:ext cx="10564063" cy="891540"/>
-          </a:xfrm>
-          <a:prstGeom prst="rect">
-            <a:avLst/>
-          </a:prstGeom>
-          <a:noFill/>
-        </p:spPr>
-        <p:txBody>
-          <a:bodyPr wrap="square" anchor="ctr" lIns="0" rIns="0" tIns="0" bIns="0">
-            <a:spAutoFit/>
-          </a:bodyPr>
-          <a:lstStyle/>
-          <a:p>
-            <a:r>
-              <a:rPr sz="1500" b="1">
+      <p:pic>
+        <p:nvPicPr>
+          <p:cNvPr id="23" name="Picture 22" descr="search-check_6571e64a041f.png"/>
+          <p:cNvPicPr>
+            <a:picLocks noChangeAspect="1"/>
+          </p:cNvPicPr>
+          <p:nvPr/>
+        </p:nvPicPr>
+        <p:blipFill>
+          <a:blip r:embed="rId4"/>
+          <a:stretch>
+            <a:fillRect/>
+          </a:stretch>
+        </p:blipFill>
+        <p:spPr>
+          <a:xfrm>
+            <a:off x="868680" y="3861816"/>
+            <a:ext cx="237744" cy="237744"/>
+          </a:xfrm>
+          <a:prstGeom prst="rect">
+            <a:avLst/>
+          </a:prstGeom>
+        </p:spPr>
+      </p:pic>
+      <p:sp>
+        <p:nvSpPr>
+          <p:cNvPr id="24" name="TextBox 23"/>
+          <p:cNvSpPr txBox="1"/>
+          <p:nvPr/>
+        </p:nvSpPr>
+        <p:spPr>
+          <a:xfrm>
+            <a:off x="1399031" y="3566160"/>
+            <a:ext cx="9987991" cy="160401"/>
+          </a:xfrm>
+          <a:prstGeom prst="rect">
+            <a:avLst/>
+          </a:prstGeom>
+          <a:noFill/>
+        </p:spPr>
+        <p:txBody>
+          <a:bodyPr wrap="square" anchor="t" lIns="0" rIns="0" tIns="0" bIns="0">
+            <a:spAutoFit/>
+          </a:bodyPr>
+          <a:lstStyle/>
+          <a:p>
+            <a:pPr algn="l"/>
+            <a:r>
+              <a:rPr sz="750" b="1" i="0" spc="250">
                 <a:solidFill>
                   <a:srgbClr val="5B3FD6"/>
                 </a:solidFill>
                 <a:latin typeface="Calibri"/>
               </a:rPr>
-              <a:t>Question. </a:t>
-            </a:r>
+              <a:t>KAVYA'S REVIEW</a:t>
+            </a:r>
+          </a:p>
+        </p:txBody>
+      </p:sp>
+      <p:sp>
+        <p:nvSpPr>
+          <p:cNvPr id="25" name="TextBox 24"/>
+          <p:cNvSpPr txBox="1"/>
+          <p:nvPr/>
+        </p:nvSpPr>
+        <p:spPr>
+          <a:xfrm>
+            <a:off x="1399031" y="3785616"/>
+            <a:ext cx="9987991" cy="682752"/>
+          </a:xfrm>
+          <a:prstGeom prst="rect">
+            <a:avLst/>
+          </a:prstGeom>
+          <a:noFill/>
+        </p:spPr>
+        <p:txBody>
+          <a:bodyPr wrap="square" anchor="t" lIns="0" rIns="0" tIns="0" bIns="0">
+            <a:spAutoFit/>
+          </a:bodyPr>
+          <a:lstStyle/>
+          <a:p>
             <a:r>
               <a:rPr sz="1500" b="0" i="0">
                 <a:solidFill>
@@ -14352,14 +14932,14 @@
                 </a:solidFill>
                 <a:latin typeface="Calibri"/>
               </a:rPr>
-              <a:t>Choose one: a) the quarter totals, so Meera has a number early; b) a profile of every field, before any number; c) the segment split, because that is where last week's finding sat; d) the notebook from Wednesday, to reuse its cleaning code.</a:t>
-            </a:r>
-          </a:p>
-        </p:txBody>
-      </p:sp>
-      <p:sp>
-        <p:nvSpPr>
-          <p:cNvPr id="12" name="Oval 11"/>
+              <a:t>A profile costs twenty minutes and tells you which of the next hundred you will spend on repairs. Skipping it moves the repairs to Monday, in front of Marketing.</a:t>
+            </a:r>
+          </a:p>
+        </p:txBody>
+      </p:sp>
+      <p:sp>
+        <p:nvSpPr>
+          <p:cNvPr id="26" name="Oval 25"/>
           <p:cNvSpPr/>
           <p:nvPr/>
         </p:nvSpPr>
@@ -14403,7 +14983,7 @@
       </p:sp>
       <p:sp>
         <p:nvSpPr>
-          <p:cNvPr id="13" name="TextBox 12"/>
+          <p:cNvPr id="27" name="TextBox 26"/>
           <p:cNvSpPr txBox="1"/>
           <p:nvPr/>
         </p:nvSpPr>
@@ -14438,7 +15018,7 @@
       </p:sp>
       <p:sp>
         <p:nvSpPr>
-          <p:cNvPr id="14" name="Oval 13"/>
+          <p:cNvPr id="28" name="Oval 27"/>
           <p:cNvSpPr/>
           <p:nvPr/>
         </p:nvSpPr>
@@ -14482,7 +15062,7 @@
       </p:sp>
       <p:sp>
         <p:nvSpPr>
-          <p:cNvPr id="15" name="TextBox 14"/>
+          <p:cNvPr id="29" name="TextBox 28"/>
           <p:cNvSpPr txBox="1"/>
           <p:nvPr/>
         </p:nvSpPr>
@@ -14517,7 +15097,7 @@
       </p:sp>
       <p:sp>
         <p:nvSpPr>
-          <p:cNvPr id="16" name="TextBox 15"/>
+          <p:cNvPr id="30" name="TextBox 29"/>
           <p:cNvSpPr txBox="1"/>
           <p:nvPr/>
         </p:nvSpPr>
@@ -14751,7 +15331,7 @@
                 </a:solidFill>
                 <a:latin typeface="Georgia"/>
               </a:rPr>
-              <a:t>Answer: a profile, before any number</a:t>
+              <a:t>Six steps in a fixed order, from profile to note</a:t>
             </a:r>
           </a:p>
         </p:txBody>
@@ -14786,46 +15366,35 @@
                 </a:solidFill>
                 <a:latin typeface="Calibri"/>
               </a:rPr>
-              <a:t>Why does the profile come before any total?</a:t>
-            </a:r>
-          </a:p>
-        </p:txBody>
-      </p:sp>
-      <p:sp>
-        <p:nvSpPr>
-          <p:cNvPr id="9" name="TextBox 8"/>
-          <p:cNvSpPr txBox="1"/>
-          <p:nvPr/>
-        </p:nvSpPr>
+              <a:t>In what order does the week's method run, and why that order?</a:t>
+            </a:r>
+          </a:p>
+        </p:txBody>
+      </p:sp>
+      <p:pic>
+        <p:nvPicPr>
+          <p:cNvPr id="9" name="mermaid diagram" descr="b5c81a6f4ee4d3c4.png"/>
+          <p:cNvPicPr>
+            <a:picLocks noChangeAspect="1"/>
+          </p:cNvPicPr>
+          <p:nvPr/>
+        </p:nvPicPr>
+        <p:blipFill>
+          <a:blip r:embed="rId5"/>
+          <a:stretch>
+            <a:fillRect/>
+          </a:stretch>
+        </p:blipFill>
         <p:spPr>
           <a:xfrm>
             <a:off x="530352" y="1956816"/>
-            <a:ext cx="3527450" cy="698500"/>
-          </a:xfrm>
-          <a:prstGeom prst="rect">
-            <a:avLst/>
-          </a:prstGeom>
-          <a:noFill/>
-        </p:spPr>
-        <p:txBody>
-          <a:bodyPr wrap="square" anchor="t" lIns="0" rIns="0" tIns="0" bIns="0">
-            <a:spAutoFit/>
-          </a:bodyPr>
-          <a:lstStyle/>
-          <a:p>
-            <a:pPr algn="l"/>
-            <a:r>
-              <a:rPr sz="4400" b="0" i="0">
-                <a:solidFill>
-                  <a:srgbClr val="5B3FD6"/>
-                </a:solidFill>
-                <a:latin typeface="Georgia"/>
-              </a:rPr>
-              <a:t>3</a:t>
-            </a:r>
-          </a:p>
-        </p:txBody>
-      </p:sp>
+            <a:ext cx="11130991" cy="937450"/>
+          </a:xfrm>
+          <a:prstGeom prst="rect">
+            <a:avLst/>
+          </a:prstGeom>
+        </p:spPr>
+      </p:pic>
       <p:sp>
         <p:nvSpPr>
           <p:cNvPr id="10" name="TextBox 9"/>
@@ -14834,474 +15403,47 @@
         </p:nvSpPr>
         <p:spPr>
           <a:xfrm>
-            <a:off x="530352" y="2691892"/>
-            <a:ext cx="3527450" cy="168656"/>
-          </a:xfrm>
-          <a:prstGeom prst="rect">
-            <a:avLst/>
-          </a:prstGeom>
-          <a:noFill/>
-        </p:spPr>
-        <p:txBody>
-          <a:bodyPr wrap="square" anchor="t" lIns="0" rIns="0" tIns="0" bIns="0">
-            <a:spAutoFit/>
-          </a:bodyPr>
-          <a:lstStyle/>
-          <a:p>
-            <a:pPr algn="l"/>
-            <a:r>
-              <a:rPr sz="800" b="1" i="0" spc="250">
-                <a:solidFill>
-                  <a:srgbClr val="1A0F5C"/>
-                </a:solidFill>
-                <a:latin typeface="Calibri"/>
-              </a:rPr>
-              <a:t>COUNTS PER FIELD</a:t>
-            </a:r>
-          </a:p>
-        </p:txBody>
-      </p:sp>
-      <p:sp>
-        <p:nvSpPr>
-          <p:cNvPr id="11" name="TextBox 10"/>
-          <p:cNvSpPr txBox="1"/>
-          <p:nvPr/>
-        </p:nvSpPr>
-        <p:spPr>
-          <a:xfrm>
-            <a:off x="530352" y="2893060"/>
-            <a:ext cx="3527450" cy="193421"/>
-          </a:xfrm>
-          <a:prstGeom prst="rect">
-            <a:avLst/>
-          </a:prstGeom>
-          <a:noFill/>
-        </p:spPr>
-        <p:txBody>
-          <a:bodyPr wrap="square" anchor="t" lIns="0" rIns="0" tIns="0" bIns="0">
-            <a:spAutoFit/>
-          </a:bodyPr>
-          <a:lstStyle/>
-          <a:p>
-            <a:pPr algn="l"/>
-            <a:r>
-              <a:rPr sz="950" b="0" i="0">
-                <a:solidFill>
-                  <a:srgbClr val="6B6690"/>
-                </a:solidFill>
-                <a:latin typeface="Calibri"/>
-              </a:rPr>
-              <a:t>present, convertible, distinct</a:t>
-            </a:r>
-          </a:p>
-        </p:txBody>
-      </p:sp>
-      <p:sp>
-        <p:nvSpPr>
-          <p:cNvPr id="12" name="Rectangle 11"/>
+            <a:off x="530352" y="3040570"/>
+            <a:ext cx="11130991" cy="1324864"/>
+          </a:xfrm>
+          <a:prstGeom prst="rect">
+            <a:avLst/>
+          </a:prstGeom>
+          <a:noFill/>
+        </p:spPr>
+        <p:txBody>
+          <a:bodyPr wrap="square" anchor="t" lIns="0" rIns="0" tIns="0" bIns="0">
+            <a:spAutoFit/>
+          </a:bodyPr>
+          <a:lstStyle/>
+          <a:p>
+            <a:pPr>
+              <a:spcAft>
+                <a:spcPts val="800"/>
+              </a:spcAft>
+            </a:pPr>
+            <a:r>
+              <a:rPr sz="1600" b="0" i="0">
+                <a:solidFill>
+                  <a:srgbClr val="1A1440"/>
+                </a:solidFill>
+                <a:latin typeface="Calibri"/>
+              </a:rPr>
+              <a:t>Each step answers a question the next one depends on: whether the file is what it claims, which rows count, whether the clean data is still the same data, which branch moved, whether chance could do it, and what Meera should do. Monday built the tree, Tuesday split it by segment, Wednesday profiled, cleaned and reconciled, and Thursday tested and wrote the note.</a:t>
+            </a:r>
+          </a:p>
+        </p:txBody>
+      </p:sp>
+      <p:sp>
+        <p:nvSpPr>
+          <p:cNvPr id="11" name="Oval 10"/>
           <p:cNvSpPr/>
           <p:nvPr/>
         </p:nvSpPr>
         <p:spPr>
           <a:xfrm>
-            <a:off x="530352" y="3145536"/>
-            <a:ext cx="3527450" cy="10972"/>
-          </a:xfrm>
-          <a:prstGeom prst="rect">
-            <a:avLst/>
-          </a:prstGeom>
-          <a:solidFill>
-            <a:srgbClr val="E4E1F1"/>
-          </a:solidFill>
-          <a:ln>
-            <a:noFill/>
-          </a:ln>
-          <a:effectLst/>
-        </p:spPr>
-        <p:style>
-          <a:lnRef idx="1">
-            <a:schemeClr val="accent1"/>
-          </a:lnRef>
-          <a:fillRef idx="3">
-            <a:schemeClr val="accent1"/>
-          </a:fillRef>
-          <a:effectRef idx="2">
-            <a:schemeClr val="accent1"/>
-          </a:effectRef>
-          <a:fontRef idx="minor">
-            <a:schemeClr val="lt1"/>
-          </a:fontRef>
-        </p:style>
-        <p:txBody>
-          <a:bodyPr rtlCol="0" anchor="ctr" wrap="square"/>
-          <a:lstStyle/>
-          <a:p>
-            <a:pPr algn="ctr"/>
-          </a:p>
-        </p:txBody>
-      </p:sp>
-      <p:sp>
-        <p:nvSpPr>
-          <p:cNvPr id="13" name="TextBox 12"/>
-          <p:cNvSpPr txBox="1"/>
-          <p:nvPr/>
-        </p:nvSpPr>
-        <p:spPr>
-          <a:xfrm>
-            <a:off x="4332122" y="1956816"/>
-            <a:ext cx="3527450" cy="698500"/>
-          </a:xfrm>
-          <a:prstGeom prst="rect">
-            <a:avLst/>
-          </a:prstGeom>
-          <a:noFill/>
-        </p:spPr>
-        <p:txBody>
-          <a:bodyPr wrap="square" anchor="t" lIns="0" rIns="0" tIns="0" bIns="0">
-            <a:spAutoFit/>
-          </a:bodyPr>
-          <a:lstStyle/>
-          <a:p>
-            <a:pPr algn="l"/>
-            <a:r>
-              <a:rPr sz="4400" b="0" i="0">
-                <a:solidFill>
-                  <a:srgbClr val="5B3FD6"/>
-                </a:solidFill>
-                <a:latin typeface="Georgia"/>
-              </a:rPr>
-              <a:t>1</a:t>
-            </a:r>
-          </a:p>
-        </p:txBody>
-      </p:sp>
-      <p:sp>
-        <p:nvSpPr>
-          <p:cNvPr id="14" name="TextBox 13"/>
-          <p:cNvSpPr txBox="1"/>
-          <p:nvPr/>
-        </p:nvSpPr>
-        <p:spPr>
-          <a:xfrm>
-            <a:off x="4332122" y="2691892"/>
-            <a:ext cx="3527450" cy="168656"/>
-          </a:xfrm>
-          <a:prstGeom prst="rect">
-            <a:avLst/>
-          </a:prstGeom>
-          <a:noFill/>
-        </p:spPr>
-        <p:txBody>
-          <a:bodyPr wrap="square" anchor="t" lIns="0" rIns="0" tIns="0" bIns="0">
-            <a:spAutoFit/>
-          </a:bodyPr>
-          <a:lstStyle/>
-          <a:p>
-            <a:pPr algn="l"/>
-            <a:r>
-              <a:rPr sz="800" b="1" i="0" spc="250">
-                <a:solidFill>
-                  <a:srgbClr val="1A0F5C"/>
-                </a:solidFill>
-                <a:latin typeface="Calibri"/>
-              </a:rPr>
-              <a:t>FINDING PER MISMATCH</a:t>
-            </a:r>
-          </a:p>
-        </p:txBody>
-      </p:sp>
-      <p:sp>
-        <p:nvSpPr>
-          <p:cNvPr id="15" name="TextBox 14"/>
-          <p:cNvSpPr txBox="1"/>
-          <p:nvPr/>
-        </p:nvSpPr>
-        <p:spPr>
-          <a:xfrm>
-            <a:off x="4332122" y="2893060"/>
-            <a:ext cx="3527450" cy="193421"/>
-          </a:xfrm>
-          <a:prstGeom prst="rect">
-            <a:avLst/>
-          </a:prstGeom>
-          <a:noFill/>
-        </p:spPr>
-        <p:txBody>
-          <a:bodyPr wrap="square" anchor="t" lIns="0" rIns="0" tIns="0" bIns="0">
-            <a:spAutoFit/>
-          </a:bodyPr>
-          <a:lstStyle/>
-          <a:p>
-            <a:pPr algn="l"/>
-            <a:r>
-              <a:rPr sz="950" b="0" i="0">
-                <a:solidFill>
-                  <a:srgbClr val="6B6690"/>
-                </a:solidFill>
-                <a:latin typeface="Calibri"/>
-              </a:rPr>
-              <a:t>each count that disagrees with the field</a:t>
-            </a:r>
-          </a:p>
-        </p:txBody>
-      </p:sp>
-      <p:sp>
-        <p:nvSpPr>
-          <p:cNvPr id="16" name="Rectangle 15"/>
-          <p:cNvSpPr/>
-          <p:nvPr/>
-        </p:nvSpPr>
-        <p:spPr>
-          <a:xfrm>
-            <a:off x="4332122" y="3145536"/>
-            <a:ext cx="3527450" cy="10972"/>
-          </a:xfrm>
-          <a:prstGeom prst="rect">
-            <a:avLst/>
-          </a:prstGeom>
-          <a:solidFill>
-            <a:srgbClr val="E4E1F1"/>
-          </a:solidFill>
-          <a:ln>
-            <a:noFill/>
-          </a:ln>
-          <a:effectLst/>
-        </p:spPr>
-        <p:style>
-          <a:lnRef idx="1">
-            <a:schemeClr val="accent1"/>
-          </a:lnRef>
-          <a:fillRef idx="3">
-            <a:schemeClr val="accent1"/>
-          </a:fillRef>
-          <a:effectRef idx="2">
-            <a:schemeClr val="accent1"/>
-          </a:effectRef>
-          <a:fontRef idx="minor">
-            <a:schemeClr val="lt1"/>
-          </a:fontRef>
-        </p:style>
-        <p:txBody>
-          <a:bodyPr rtlCol="0" anchor="ctr" wrap="square"/>
-          <a:lstStyle/>
-          <a:p>
-            <a:pPr algn="ctr"/>
-          </a:p>
-        </p:txBody>
-      </p:sp>
-      <p:sp>
-        <p:nvSpPr>
-          <p:cNvPr id="17" name="TextBox 16"/>
-          <p:cNvSpPr txBox="1"/>
-          <p:nvPr/>
-        </p:nvSpPr>
-        <p:spPr>
-          <a:xfrm>
-            <a:off x="8133892" y="1956816"/>
-            <a:ext cx="3527450" cy="698500"/>
-          </a:xfrm>
-          <a:prstGeom prst="rect">
-            <a:avLst/>
-          </a:prstGeom>
-          <a:noFill/>
-        </p:spPr>
-        <p:txBody>
-          <a:bodyPr wrap="square" anchor="t" lIns="0" rIns="0" tIns="0" bIns="0">
-            <a:spAutoFit/>
-          </a:bodyPr>
-          <a:lstStyle/>
-          <a:p>
-            <a:pPr algn="l"/>
-            <a:r>
-              <a:rPr sz="4400" b="0" i="0">
-                <a:solidFill>
-                  <a:srgbClr val="5B3FD6"/>
-                </a:solidFill>
-                <a:latin typeface="Georgia"/>
-              </a:rPr>
-              <a:t>0</a:t>
-            </a:r>
-          </a:p>
-        </p:txBody>
-      </p:sp>
-      <p:sp>
-        <p:nvSpPr>
-          <p:cNvPr id="18" name="TextBox 17"/>
-          <p:cNvSpPr txBox="1"/>
-          <p:nvPr/>
-        </p:nvSpPr>
-        <p:spPr>
-          <a:xfrm>
-            <a:off x="8133892" y="2691892"/>
-            <a:ext cx="3527450" cy="168656"/>
-          </a:xfrm>
-          <a:prstGeom prst="rect">
-            <a:avLst/>
-          </a:prstGeom>
-          <a:noFill/>
-        </p:spPr>
-        <p:txBody>
-          <a:bodyPr wrap="square" anchor="t" lIns="0" rIns="0" tIns="0" bIns="0">
-            <a:spAutoFit/>
-          </a:bodyPr>
-          <a:lstStyle/>
-          <a:p>
-            <a:pPr algn="l"/>
-            <a:r>
-              <a:rPr sz="800" b="1" i="0" spc="250">
-                <a:solidFill>
-                  <a:srgbClr val="1A0F5C"/>
-                </a:solidFill>
-                <a:latin typeface="Calibri"/>
-              </a:rPr>
-              <a:t>NUMBERS QUOTED</a:t>
-            </a:r>
-          </a:p>
-        </p:txBody>
-      </p:sp>
-      <p:sp>
-        <p:nvSpPr>
-          <p:cNvPr id="19" name="TextBox 18"/>
-          <p:cNvSpPr txBox="1"/>
-          <p:nvPr/>
-        </p:nvSpPr>
-        <p:spPr>
-          <a:xfrm>
-            <a:off x="8133892" y="2893060"/>
-            <a:ext cx="3527450" cy="193421"/>
-          </a:xfrm>
-          <a:prstGeom prst="rect">
-            <a:avLst/>
-          </a:prstGeom>
-          <a:noFill/>
-        </p:spPr>
-        <p:txBody>
-          <a:bodyPr wrap="square" anchor="t" lIns="0" rIns="0" tIns="0" bIns="0">
-            <a:spAutoFit/>
-          </a:bodyPr>
-          <a:lstStyle/>
-          <a:p>
-            <a:pPr algn="l"/>
-            <a:r>
-              <a:rPr sz="950" b="0" i="0">
-                <a:solidFill>
-                  <a:srgbClr val="6B6690"/>
-                </a:solidFill>
-                <a:latin typeface="Calibri"/>
-              </a:rPr>
-              <a:t>until the profile is read</a:t>
-            </a:r>
-          </a:p>
-        </p:txBody>
-      </p:sp>
-      <p:sp>
-        <p:nvSpPr>
-          <p:cNvPr id="20" name="Rectangle 19"/>
-          <p:cNvSpPr/>
-          <p:nvPr/>
-        </p:nvSpPr>
-        <p:spPr>
-          <a:xfrm>
-            <a:off x="8133892" y="3145536"/>
-            <a:ext cx="3527450" cy="10972"/>
-          </a:xfrm>
-          <a:prstGeom prst="rect">
-            <a:avLst/>
-          </a:prstGeom>
-          <a:solidFill>
-            <a:srgbClr val="E4E1F1"/>
-          </a:solidFill>
-          <a:ln>
-            <a:noFill/>
-          </a:ln>
-          <a:effectLst/>
-        </p:spPr>
-        <p:style>
-          <a:lnRef idx="1">
-            <a:schemeClr val="accent1"/>
-          </a:lnRef>
-          <a:fillRef idx="3">
-            <a:schemeClr val="accent1"/>
-          </a:fillRef>
-          <a:effectRef idx="2">
-            <a:schemeClr val="accent1"/>
-          </a:effectRef>
-          <a:fontRef idx="minor">
-            <a:schemeClr val="lt1"/>
-          </a:fontRef>
-        </p:style>
-        <p:txBody>
-          <a:bodyPr rtlCol="0" anchor="ctr" wrap="square"/>
-          <a:lstStyle/>
-          <a:p>
-            <a:pPr algn="ctr"/>
-          </a:p>
-        </p:txBody>
-      </p:sp>
-      <p:sp>
-        <p:nvSpPr>
-          <p:cNvPr id="21" name="Rounded Rectangle 20"/>
-          <p:cNvSpPr/>
-          <p:nvPr/>
-        </p:nvSpPr>
-        <p:spPr>
-          <a:xfrm>
-            <a:off x="530352" y="3419856"/>
-            <a:ext cx="11130991" cy="1121664"/>
-          </a:xfrm>
-          <a:prstGeom prst="roundRect">
-            <a:avLst>
-              <a:gd name="adj" fmla="val 5000"/>
-            </a:avLst>
-          </a:prstGeom>
-          <a:solidFill>
-            <a:srgbClr val="F7F5FD"/>
-          </a:solidFill>
-          <a:ln w="9525">
-            <a:solidFill>
-              <a:srgbClr val="E4E1F1"/>
-            </a:solidFill>
-          </a:ln>
-          <a:effectLst>
-            <a:outerShdw blurRad="76200" dist="19050" dir="5400000" algn="bl" rotWithShape="0">
-              <a:srgbClr val="1A0F5C">
-                <a:alpha val="12000"/>
-              </a:srgbClr>
-            </a:outerShdw>
-          </a:effectLst>
-        </p:spPr>
-        <p:style>
-          <a:lnRef idx="1">
-            <a:schemeClr val="accent1"/>
-          </a:lnRef>
-          <a:fillRef idx="3">
-            <a:schemeClr val="accent1"/>
-          </a:fillRef>
-          <a:effectRef idx="2">
-            <a:schemeClr val="accent1"/>
-          </a:effectRef>
-          <a:fontRef idx="minor">
-            <a:schemeClr val="lt1"/>
-          </a:fontRef>
-        </p:style>
-        <p:txBody>
-          <a:bodyPr rtlCol="0" anchor="ctr" wrap="square"/>
-          <a:lstStyle/>
-          <a:p>
-            <a:pPr algn="ctr"/>
-          </a:p>
-        </p:txBody>
-      </p:sp>
-      <p:sp>
-        <p:nvSpPr>
-          <p:cNvPr id="22" name="Oval 21"/>
-          <p:cNvSpPr/>
-          <p:nvPr/>
-        </p:nvSpPr>
-        <p:spPr>
-          <a:xfrm>
-            <a:off x="758952" y="3752088"/>
-            <a:ext cx="457200" cy="457200"/>
+            <a:off x="530352" y="6492240"/>
+            <a:ext cx="64008" cy="64008"/>
           </a:xfrm>
           <a:prstGeom prst="ellipse">
             <a:avLst/>
@@ -15336,146 +15478,9 @@
           </a:p>
         </p:txBody>
       </p:sp>
-      <p:pic>
-        <p:nvPicPr>
-          <p:cNvPr id="23" name="Picture 22" descr="search-check_6571e64a041f.png"/>
-          <p:cNvPicPr>
-            <a:picLocks noChangeAspect="1"/>
-          </p:cNvPicPr>
-          <p:nvPr/>
-        </p:nvPicPr>
-        <p:blipFill>
-          <a:blip r:embed="rId4"/>
-          <a:stretch>
-            <a:fillRect/>
-          </a:stretch>
-        </p:blipFill>
-        <p:spPr>
-          <a:xfrm>
-            <a:off x="868680" y="3861816"/>
-            <a:ext cx="237744" cy="237744"/>
-          </a:xfrm>
-          <a:prstGeom prst="rect">
-            <a:avLst/>
-          </a:prstGeom>
-        </p:spPr>
-      </p:pic>
-      <p:sp>
-        <p:nvSpPr>
-          <p:cNvPr id="24" name="TextBox 23"/>
-          <p:cNvSpPr txBox="1"/>
-          <p:nvPr/>
-        </p:nvSpPr>
-        <p:spPr>
-          <a:xfrm>
-            <a:off x="1399031" y="3566160"/>
-            <a:ext cx="9987991" cy="160401"/>
-          </a:xfrm>
-          <a:prstGeom prst="rect">
-            <a:avLst/>
-          </a:prstGeom>
-          <a:noFill/>
-        </p:spPr>
-        <p:txBody>
-          <a:bodyPr wrap="square" anchor="t" lIns="0" rIns="0" tIns="0" bIns="0">
-            <a:spAutoFit/>
-          </a:bodyPr>
-          <a:lstStyle/>
-          <a:p>
-            <a:pPr algn="l"/>
-            <a:r>
-              <a:rPr sz="750" b="1" i="0" spc="250">
-                <a:solidFill>
-                  <a:srgbClr val="5B3FD6"/>
-                </a:solidFill>
-                <a:latin typeface="Calibri"/>
-              </a:rPr>
-              <a:t>KAVYA'S REVIEW</a:t>
-            </a:r>
-          </a:p>
-        </p:txBody>
-      </p:sp>
-      <p:sp>
-        <p:nvSpPr>
-          <p:cNvPr id="25" name="TextBox 24"/>
-          <p:cNvSpPr txBox="1"/>
-          <p:nvPr/>
-        </p:nvSpPr>
-        <p:spPr>
-          <a:xfrm>
-            <a:off x="1399031" y="3785616"/>
-            <a:ext cx="9987991" cy="682752"/>
-          </a:xfrm>
-          <a:prstGeom prst="rect">
-            <a:avLst/>
-          </a:prstGeom>
-          <a:noFill/>
-        </p:spPr>
-        <p:txBody>
-          <a:bodyPr wrap="square" anchor="t" lIns="0" rIns="0" tIns="0" bIns="0">
-            <a:spAutoFit/>
-          </a:bodyPr>
-          <a:lstStyle/>
-          <a:p>
-            <a:r>
-              <a:rPr sz="1500" b="0" i="0">
-                <a:solidFill>
-                  <a:srgbClr val="1A1440"/>
-                </a:solidFill>
-                <a:latin typeface="Calibri"/>
-              </a:rPr>
-              <a:t>A profile costs twenty minutes and tells you which of the next hundred you will spend on repairs. Skipping it moves the repairs to Monday, in front of Marketing.</a:t>
-            </a:r>
-          </a:p>
-        </p:txBody>
-      </p:sp>
-      <p:sp>
-        <p:nvSpPr>
-          <p:cNvPr id="26" name="Oval 25"/>
-          <p:cNvSpPr/>
-          <p:nvPr/>
-        </p:nvSpPr>
-        <p:spPr>
-          <a:xfrm>
-            <a:off x="530352" y="6492240"/>
-            <a:ext cx="64008" cy="64008"/>
-          </a:xfrm>
-          <a:prstGeom prst="ellipse">
-            <a:avLst/>
-          </a:prstGeom>
-          <a:solidFill>
-            <a:srgbClr val="5B3FD6"/>
-          </a:solidFill>
-          <a:ln>
-            <a:noFill/>
-          </a:ln>
-          <a:effectLst/>
-        </p:spPr>
-        <p:style>
-          <a:lnRef idx="1">
-            <a:schemeClr val="accent1"/>
-          </a:lnRef>
-          <a:fillRef idx="3">
-            <a:schemeClr val="accent1"/>
-          </a:fillRef>
-          <a:effectRef idx="2">
-            <a:schemeClr val="accent1"/>
-          </a:effectRef>
-          <a:fontRef idx="minor">
-            <a:schemeClr val="lt1"/>
-          </a:fontRef>
-        </p:style>
-        <p:txBody>
-          <a:bodyPr rtlCol="0" anchor="ctr" wrap="square"/>
-          <a:lstStyle/>
-          <a:p>
-            <a:pPr algn="ctr"/>
-          </a:p>
-        </p:txBody>
-      </p:sp>
-      <p:sp>
-        <p:nvSpPr>
-          <p:cNvPr id="27" name="TextBox 26"/>
+      <p:sp>
+        <p:nvSpPr>
+          <p:cNvPr id="12" name="TextBox 11"/>
           <p:cNvSpPr txBox="1"/>
           <p:nvPr/>
         </p:nvSpPr>
@@ -15510,7 +15515,7 @@
       </p:sp>
       <p:sp>
         <p:nvSpPr>
-          <p:cNvPr id="28" name="Oval 27"/>
+          <p:cNvPr id="13" name="Oval 12"/>
           <p:cNvSpPr/>
           <p:nvPr/>
         </p:nvSpPr>
@@ -15554,7 +15559,7 @@
       </p:sp>
       <p:sp>
         <p:nvSpPr>
-          <p:cNvPr id="29" name="TextBox 28"/>
+          <p:cNvPr id="14" name="TextBox 13"/>
           <p:cNvSpPr txBox="1"/>
           <p:nvPr/>
         </p:nvSpPr>
@@ -15589,7 +15594,7 @@
       </p:sp>
       <p:sp>
         <p:nvSpPr>
-          <p:cNvPr id="30" name="TextBox 29"/>
+          <p:cNvPr id="15" name="TextBox 14"/>
           <p:cNvSpPr txBox="1"/>
           <p:nvPr/>
         </p:nvSpPr>
@@ -16085,7 +16090,7 @@
                 </a:solidFill>
                 <a:latin typeface="Calibri"/>
               </a:rPr>
-              <a:t>No chat model, no autocomplete that writes code, no search for code.</a:t>
+              <a:t>No chat model, code-writing autocomplete or search for code is allowed.</a:t>
             </a:r>
           </a:p>
         </p:txBody>
@@ -16312,7 +16317,7 @@
                 </a:solidFill>
                 <a:latin typeface="Calibri"/>
               </a:rPr>
-              <a:t>No other notebook in notebooks/, and no deck or cheat sheet, open on any screen.</a:t>
+              <a:t>No other notebook in notebooks/, deck or cheat sheet is open on any screen.</a:t>
             </a:r>
           </a:p>
         </p:txBody>

--- a/content/W01/D5/slides/C2_W01_D05_lab_STUDENT.pptx
+++ b/content/W01/D5/slides/C2_W01_D05_lab_STUDENT.pptx
@@ -825,7 +825,7 @@
           <a:lstStyle/>
           <a:p>
             <a:r>
-              <a:t>LIVE, 20 minutes. The TAs copy each learner's output folder at the 120-minute mark before anyone</a:t>
+              <a:t>LIVE, 19 minutes, and S11 takes the twentieth. The TAs copy each learner's output folder at the 120-minute mark before anyone</a:t>
             </a:r>
           </a:p>
           <a:p>

--- a/content/W01/D5/slides/C2_W01_D05_lab_STUDENT.pptx
+++ b/content/W01/D5/slides/C2_W01_D05_lab_STUDENT.pptx
@@ -8573,7 +8573,7 @@
                 </a:solidFill>
                 <a:latin typeface="Georgia"/>
               </a:rPr>
-              <a:t>Your TA marks the one step you do not own yet</a:t>
+              <a:t>Your TA notes the one step you do not own yet</a:t>
             </a:r>
           </a:p>
         </p:txBody>
